--- a/gakkyu/tegami/pptx/T5.pptx
+++ b/gakkyu/tegami/pptx/T5.pptx
@@ -3622,6 +3622,7 @@
               <a:srgbClr val="6AA7A7"/>
             </a:solidFill>
           </a:ln>
+          <a:effectLst/>
         </p:spPr>
         <p:style>
           <a:lnRef idx="2">
@@ -3630,7 +3631,7 @@
           <a:fillRef idx="0">
             <a:schemeClr val="accent1"/>
           </a:fillRef>
-          <a:effectRef idx="1">
+          <a:effectRef idx="0">
             <a:schemeClr val="accent1"/>
           </a:effectRef>
           <a:fontRef idx="minor">
@@ -3681,7 +3682,7 @@
             <a:fillRef idx="3">
               <a:schemeClr val="accent1"/>
             </a:fillRef>
-            <a:effectRef idx="2">
+            <a:effectRef idx="0">
               <a:schemeClr val="accent1"/>
             </a:effectRef>
             <a:fontRef idx="minor">
@@ -3715,15 +3716,16 @@
                 <a:srgbClr val="8FBFBF"/>
               </a:solidFill>
             </a:ln>
-          </p:spPr>
-          <p:style>
-            <a:lnRef idx="2">
-              <a:schemeClr val="accent1"/>
-            </a:lnRef>
-            <a:fillRef idx="0">
-              <a:schemeClr val="accent1"/>
-            </a:fillRef>
-            <a:effectRef idx="1">
+            <a:effectLst/>
+          </p:spPr>
+          <p:style>
+            <a:lnRef idx="2">
+              <a:schemeClr val="accent1"/>
+            </a:lnRef>
+            <a:fillRef idx="0">
+              <a:schemeClr val="accent1"/>
+            </a:fillRef>
+            <a:effectRef idx="0">
               <a:schemeClr val="accent1"/>
             </a:effectRef>
             <a:fontRef idx="minor">
@@ -3750,15 +3752,16 @@
                 <a:srgbClr val="8FBFBF"/>
               </a:solidFill>
             </a:ln>
-          </p:spPr>
-          <p:style>
-            <a:lnRef idx="2">
-              <a:schemeClr val="accent1"/>
-            </a:lnRef>
-            <a:fillRef idx="0">
-              <a:schemeClr val="accent1"/>
-            </a:fillRef>
-            <a:effectRef idx="1">
+            <a:effectLst/>
+          </p:spPr>
+          <p:style>
+            <a:lnRef idx="2">
+              <a:schemeClr val="accent1"/>
+            </a:lnRef>
+            <a:fillRef idx="0">
+              <a:schemeClr val="accent1"/>
+            </a:fillRef>
+            <a:effectRef idx="0">
               <a:schemeClr val="accent1"/>
             </a:effectRef>
             <a:fontRef idx="minor">
@@ -3785,15 +3788,16 @@
                 <a:srgbClr val="8FBFBF"/>
               </a:solidFill>
             </a:ln>
-          </p:spPr>
-          <p:style>
-            <a:lnRef idx="2">
-              <a:schemeClr val="accent1"/>
-            </a:lnRef>
-            <a:fillRef idx="0">
-              <a:schemeClr val="accent1"/>
-            </a:fillRef>
-            <a:effectRef idx="1">
+            <a:effectLst/>
+          </p:spPr>
+          <p:style>
+            <a:lnRef idx="2">
+              <a:schemeClr val="accent1"/>
+            </a:lnRef>
+            <a:fillRef idx="0">
+              <a:schemeClr val="accent1"/>
+            </a:fillRef>
+            <a:effectRef idx="0">
               <a:schemeClr val="accent1"/>
             </a:effectRef>
             <a:fontRef idx="minor">
@@ -3820,15 +3824,16 @@
                 <a:srgbClr val="8FBFBF"/>
               </a:solidFill>
             </a:ln>
-          </p:spPr>
-          <p:style>
-            <a:lnRef idx="2">
-              <a:schemeClr val="accent1"/>
-            </a:lnRef>
-            <a:fillRef idx="0">
-              <a:schemeClr val="accent1"/>
-            </a:fillRef>
-            <a:effectRef idx="1">
+            <a:effectLst/>
+          </p:spPr>
+          <p:style>
+            <a:lnRef idx="2">
+              <a:schemeClr val="accent1"/>
+            </a:lnRef>
+            <a:fillRef idx="0">
+              <a:schemeClr val="accent1"/>
+            </a:fillRef>
+            <a:effectRef idx="0">
               <a:schemeClr val="accent1"/>
             </a:effectRef>
             <a:fontRef idx="minor">
@@ -3855,15 +3860,16 @@
                 <a:srgbClr val="8FBFBF"/>
               </a:solidFill>
             </a:ln>
-          </p:spPr>
-          <p:style>
-            <a:lnRef idx="2">
-              <a:schemeClr val="accent1"/>
-            </a:lnRef>
-            <a:fillRef idx="0">
-              <a:schemeClr val="accent1"/>
-            </a:fillRef>
-            <a:effectRef idx="1">
+            <a:effectLst/>
+          </p:spPr>
+          <p:style>
+            <a:lnRef idx="2">
+              <a:schemeClr val="accent1"/>
+            </a:lnRef>
+            <a:fillRef idx="0">
+              <a:schemeClr val="accent1"/>
+            </a:fillRef>
+            <a:effectRef idx="0">
               <a:schemeClr val="accent1"/>
             </a:effectRef>
             <a:fontRef idx="minor">
@@ -3890,15 +3896,16 @@
                 <a:srgbClr val="8FBFBF"/>
               </a:solidFill>
             </a:ln>
-          </p:spPr>
-          <p:style>
-            <a:lnRef idx="2">
-              <a:schemeClr val="accent1"/>
-            </a:lnRef>
-            <a:fillRef idx="0">
-              <a:schemeClr val="accent1"/>
-            </a:fillRef>
-            <a:effectRef idx="1">
+            <a:effectLst/>
+          </p:spPr>
+          <p:style>
+            <a:lnRef idx="2">
+              <a:schemeClr val="accent1"/>
+            </a:lnRef>
+            <a:fillRef idx="0">
+              <a:schemeClr val="accent1"/>
+            </a:fillRef>
+            <a:effectRef idx="0">
               <a:schemeClr val="accent1"/>
             </a:effectRef>
             <a:fontRef idx="minor">
@@ -3925,15 +3932,16 @@
                 <a:srgbClr val="8FBFBF"/>
               </a:solidFill>
             </a:ln>
-          </p:spPr>
-          <p:style>
-            <a:lnRef idx="2">
-              <a:schemeClr val="accent1"/>
-            </a:lnRef>
-            <a:fillRef idx="0">
-              <a:schemeClr val="accent1"/>
-            </a:fillRef>
-            <a:effectRef idx="1">
+            <a:effectLst/>
+          </p:spPr>
+          <p:style>
+            <a:lnRef idx="2">
+              <a:schemeClr val="accent1"/>
+            </a:lnRef>
+            <a:fillRef idx="0">
+              <a:schemeClr val="accent1"/>
+            </a:fillRef>
+            <a:effectRef idx="0">
               <a:schemeClr val="accent1"/>
             </a:effectRef>
             <a:fontRef idx="minor">
@@ -3960,15 +3968,16 @@
                 <a:srgbClr val="8FBFBF"/>
               </a:solidFill>
             </a:ln>
-          </p:spPr>
-          <p:style>
-            <a:lnRef idx="2">
-              <a:schemeClr val="accent1"/>
-            </a:lnRef>
-            <a:fillRef idx="0">
-              <a:schemeClr val="accent1"/>
-            </a:fillRef>
-            <a:effectRef idx="1">
+            <a:effectLst/>
+          </p:spPr>
+          <p:style>
+            <a:lnRef idx="2">
+              <a:schemeClr val="accent1"/>
+            </a:lnRef>
+            <a:fillRef idx="0">
+              <a:schemeClr val="accent1"/>
+            </a:fillRef>
+            <a:effectRef idx="0">
               <a:schemeClr val="accent1"/>
             </a:effectRef>
             <a:fontRef idx="minor">
@@ -3995,15 +4004,16 @@
                 <a:srgbClr val="8FBFBF"/>
               </a:solidFill>
             </a:ln>
-          </p:spPr>
-          <p:style>
-            <a:lnRef idx="2">
-              <a:schemeClr val="accent1"/>
-            </a:lnRef>
-            <a:fillRef idx="0">
-              <a:schemeClr val="accent1"/>
-            </a:fillRef>
-            <a:effectRef idx="1">
+            <a:effectLst/>
+          </p:spPr>
+          <p:style>
+            <a:lnRef idx="2">
+              <a:schemeClr val="accent1"/>
+            </a:lnRef>
+            <a:fillRef idx="0">
+              <a:schemeClr val="accent1"/>
+            </a:fillRef>
+            <a:effectRef idx="0">
               <a:schemeClr val="accent1"/>
             </a:effectRef>
             <a:fontRef idx="minor">
@@ -4030,15 +4040,16 @@
                 <a:srgbClr val="8FBFBF"/>
               </a:solidFill>
             </a:ln>
-          </p:spPr>
-          <p:style>
-            <a:lnRef idx="2">
-              <a:schemeClr val="accent1"/>
-            </a:lnRef>
-            <a:fillRef idx="0">
-              <a:schemeClr val="accent1"/>
-            </a:fillRef>
-            <a:effectRef idx="1">
+            <a:effectLst/>
+          </p:spPr>
+          <p:style>
+            <a:lnRef idx="2">
+              <a:schemeClr val="accent1"/>
+            </a:lnRef>
+            <a:fillRef idx="0">
+              <a:schemeClr val="accent1"/>
+            </a:fillRef>
+            <a:effectRef idx="0">
               <a:schemeClr val="accent1"/>
             </a:effectRef>
             <a:fontRef idx="minor">
@@ -4065,15 +4076,16 @@
                 <a:srgbClr val="8FBFBF"/>
               </a:solidFill>
             </a:ln>
-          </p:spPr>
-          <p:style>
-            <a:lnRef idx="2">
-              <a:schemeClr val="accent1"/>
-            </a:lnRef>
-            <a:fillRef idx="0">
-              <a:schemeClr val="accent1"/>
-            </a:fillRef>
-            <a:effectRef idx="1">
+            <a:effectLst/>
+          </p:spPr>
+          <p:style>
+            <a:lnRef idx="2">
+              <a:schemeClr val="accent1"/>
+            </a:lnRef>
+            <a:fillRef idx="0">
+              <a:schemeClr val="accent1"/>
+            </a:fillRef>
+            <a:effectRef idx="0">
               <a:schemeClr val="accent1"/>
             </a:effectRef>
             <a:fontRef idx="minor">
@@ -4100,15 +4112,16 @@
                 <a:srgbClr val="8FBFBF"/>
               </a:solidFill>
             </a:ln>
-          </p:spPr>
-          <p:style>
-            <a:lnRef idx="2">
-              <a:schemeClr val="accent1"/>
-            </a:lnRef>
-            <a:fillRef idx="0">
-              <a:schemeClr val="accent1"/>
-            </a:fillRef>
-            <a:effectRef idx="1">
+            <a:effectLst/>
+          </p:spPr>
+          <p:style>
+            <a:lnRef idx="2">
+              <a:schemeClr val="accent1"/>
+            </a:lnRef>
+            <a:fillRef idx="0">
+              <a:schemeClr val="accent1"/>
+            </a:fillRef>
+            <a:effectRef idx="0">
               <a:schemeClr val="accent1"/>
             </a:effectRef>
             <a:fontRef idx="minor">
@@ -4135,15 +4148,16 @@
                 <a:srgbClr val="8FBFBF"/>
               </a:solidFill>
             </a:ln>
-          </p:spPr>
-          <p:style>
-            <a:lnRef idx="2">
-              <a:schemeClr val="accent1"/>
-            </a:lnRef>
-            <a:fillRef idx="0">
-              <a:schemeClr val="accent1"/>
-            </a:fillRef>
-            <a:effectRef idx="1">
+            <a:effectLst/>
+          </p:spPr>
+          <p:style>
+            <a:lnRef idx="2">
+              <a:schemeClr val="accent1"/>
+            </a:lnRef>
+            <a:fillRef idx="0">
+              <a:schemeClr val="accent1"/>
+            </a:fillRef>
+            <a:effectRef idx="0">
               <a:schemeClr val="accent1"/>
             </a:effectRef>
             <a:fontRef idx="minor">
@@ -4195,7 +4209,7 @@
             <a:fillRef idx="3">
               <a:schemeClr val="accent1"/>
             </a:fillRef>
-            <a:effectRef idx="2">
+            <a:effectRef idx="0">
               <a:schemeClr val="accent1"/>
             </a:effectRef>
             <a:fontRef idx="minor">
@@ -4229,15 +4243,16 @@
                 <a:srgbClr val="8FBFBF"/>
               </a:solidFill>
             </a:ln>
-          </p:spPr>
-          <p:style>
-            <a:lnRef idx="2">
-              <a:schemeClr val="accent1"/>
-            </a:lnRef>
-            <a:fillRef idx="0">
-              <a:schemeClr val="accent1"/>
-            </a:fillRef>
-            <a:effectRef idx="1">
+            <a:effectLst/>
+          </p:spPr>
+          <p:style>
+            <a:lnRef idx="2">
+              <a:schemeClr val="accent1"/>
+            </a:lnRef>
+            <a:fillRef idx="0">
+              <a:schemeClr val="accent1"/>
+            </a:fillRef>
+            <a:effectRef idx="0">
               <a:schemeClr val="accent1"/>
             </a:effectRef>
             <a:fontRef idx="minor">
@@ -4264,15 +4279,16 @@
                 <a:srgbClr val="8FBFBF"/>
               </a:solidFill>
             </a:ln>
-          </p:spPr>
-          <p:style>
-            <a:lnRef idx="2">
-              <a:schemeClr val="accent1"/>
-            </a:lnRef>
-            <a:fillRef idx="0">
-              <a:schemeClr val="accent1"/>
-            </a:fillRef>
-            <a:effectRef idx="1">
+            <a:effectLst/>
+          </p:spPr>
+          <p:style>
+            <a:lnRef idx="2">
+              <a:schemeClr val="accent1"/>
+            </a:lnRef>
+            <a:fillRef idx="0">
+              <a:schemeClr val="accent1"/>
+            </a:fillRef>
+            <a:effectRef idx="0">
               <a:schemeClr val="accent1"/>
             </a:effectRef>
             <a:fontRef idx="minor">
@@ -4299,15 +4315,16 @@
                 <a:srgbClr val="8FBFBF"/>
               </a:solidFill>
             </a:ln>
-          </p:spPr>
-          <p:style>
-            <a:lnRef idx="2">
-              <a:schemeClr val="accent1"/>
-            </a:lnRef>
-            <a:fillRef idx="0">
-              <a:schemeClr val="accent1"/>
-            </a:fillRef>
-            <a:effectRef idx="1">
+            <a:effectLst/>
+          </p:spPr>
+          <p:style>
+            <a:lnRef idx="2">
+              <a:schemeClr val="accent1"/>
+            </a:lnRef>
+            <a:fillRef idx="0">
+              <a:schemeClr val="accent1"/>
+            </a:fillRef>
+            <a:effectRef idx="0">
               <a:schemeClr val="accent1"/>
             </a:effectRef>
             <a:fontRef idx="minor">
@@ -4334,15 +4351,16 @@
                 <a:srgbClr val="8FBFBF"/>
               </a:solidFill>
             </a:ln>
-          </p:spPr>
-          <p:style>
-            <a:lnRef idx="2">
-              <a:schemeClr val="accent1"/>
-            </a:lnRef>
-            <a:fillRef idx="0">
-              <a:schemeClr val="accent1"/>
-            </a:fillRef>
-            <a:effectRef idx="1">
+            <a:effectLst/>
+          </p:spPr>
+          <p:style>
+            <a:lnRef idx="2">
+              <a:schemeClr val="accent1"/>
+            </a:lnRef>
+            <a:fillRef idx="0">
+              <a:schemeClr val="accent1"/>
+            </a:fillRef>
+            <a:effectRef idx="0">
               <a:schemeClr val="accent1"/>
             </a:effectRef>
             <a:fontRef idx="minor">
@@ -4369,15 +4387,16 @@
                 <a:srgbClr val="8FBFBF"/>
               </a:solidFill>
             </a:ln>
-          </p:spPr>
-          <p:style>
-            <a:lnRef idx="2">
-              <a:schemeClr val="accent1"/>
-            </a:lnRef>
-            <a:fillRef idx="0">
-              <a:schemeClr val="accent1"/>
-            </a:fillRef>
-            <a:effectRef idx="1">
+            <a:effectLst/>
+          </p:spPr>
+          <p:style>
+            <a:lnRef idx="2">
+              <a:schemeClr val="accent1"/>
+            </a:lnRef>
+            <a:fillRef idx="0">
+              <a:schemeClr val="accent1"/>
+            </a:fillRef>
+            <a:effectRef idx="0">
               <a:schemeClr val="accent1"/>
             </a:effectRef>
             <a:fontRef idx="minor">
@@ -4404,15 +4423,16 @@
                 <a:srgbClr val="8FBFBF"/>
               </a:solidFill>
             </a:ln>
-          </p:spPr>
-          <p:style>
-            <a:lnRef idx="2">
-              <a:schemeClr val="accent1"/>
-            </a:lnRef>
-            <a:fillRef idx="0">
-              <a:schemeClr val="accent1"/>
-            </a:fillRef>
-            <a:effectRef idx="1">
+            <a:effectLst/>
+          </p:spPr>
+          <p:style>
+            <a:lnRef idx="2">
+              <a:schemeClr val="accent1"/>
+            </a:lnRef>
+            <a:fillRef idx="0">
+              <a:schemeClr val="accent1"/>
+            </a:fillRef>
+            <a:effectRef idx="0">
               <a:schemeClr val="accent1"/>
             </a:effectRef>
             <a:fontRef idx="minor">
@@ -4439,15 +4459,16 @@
                 <a:srgbClr val="8FBFBF"/>
               </a:solidFill>
             </a:ln>
-          </p:spPr>
-          <p:style>
-            <a:lnRef idx="2">
-              <a:schemeClr val="accent1"/>
-            </a:lnRef>
-            <a:fillRef idx="0">
-              <a:schemeClr val="accent1"/>
-            </a:fillRef>
-            <a:effectRef idx="1">
+            <a:effectLst/>
+          </p:spPr>
+          <p:style>
+            <a:lnRef idx="2">
+              <a:schemeClr val="accent1"/>
+            </a:lnRef>
+            <a:fillRef idx="0">
+              <a:schemeClr val="accent1"/>
+            </a:fillRef>
+            <a:effectRef idx="0">
               <a:schemeClr val="accent1"/>
             </a:effectRef>
             <a:fontRef idx="minor">
@@ -4474,15 +4495,16 @@
                 <a:srgbClr val="8FBFBF"/>
               </a:solidFill>
             </a:ln>
-          </p:spPr>
-          <p:style>
-            <a:lnRef idx="2">
-              <a:schemeClr val="accent1"/>
-            </a:lnRef>
-            <a:fillRef idx="0">
-              <a:schemeClr val="accent1"/>
-            </a:fillRef>
-            <a:effectRef idx="1">
+            <a:effectLst/>
+          </p:spPr>
+          <p:style>
+            <a:lnRef idx="2">
+              <a:schemeClr val="accent1"/>
+            </a:lnRef>
+            <a:fillRef idx="0">
+              <a:schemeClr val="accent1"/>
+            </a:fillRef>
+            <a:effectRef idx="0">
               <a:schemeClr val="accent1"/>
             </a:effectRef>
             <a:fontRef idx="minor">
@@ -4509,15 +4531,16 @@
                 <a:srgbClr val="8FBFBF"/>
               </a:solidFill>
             </a:ln>
-          </p:spPr>
-          <p:style>
-            <a:lnRef idx="2">
-              <a:schemeClr val="accent1"/>
-            </a:lnRef>
-            <a:fillRef idx="0">
-              <a:schemeClr val="accent1"/>
-            </a:fillRef>
-            <a:effectRef idx="1">
+            <a:effectLst/>
+          </p:spPr>
+          <p:style>
+            <a:lnRef idx="2">
+              <a:schemeClr val="accent1"/>
+            </a:lnRef>
+            <a:fillRef idx="0">
+              <a:schemeClr val="accent1"/>
+            </a:fillRef>
+            <a:effectRef idx="0">
               <a:schemeClr val="accent1"/>
             </a:effectRef>
             <a:fontRef idx="minor">
@@ -4544,15 +4567,16 @@
                 <a:srgbClr val="8FBFBF"/>
               </a:solidFill>
             </a:ln>
-          </p:spPr>
-          <p:style>
-            <a:lnRef idx="2">
-              <a:schemeClr val="accent1"/>
-            </a:lnRef>
-            <a:fillRef idx="0">
-              <a:schemeClr val="accent1"/>
-            </a:fillRef>
-            <a:effectRef idx="1">
+            <a:effectLst/>
+          </p:spPr>
+          <p:style>
+            <a:lnRef idx="2">
+              <a:schemeClr val="accent1"/>
+            </a:lnRef>
+            <a:fillRef idx="0">
+              <a:schemeClr val="accent1"/>
+            </a:fillRef>
+            <a:effectRef idx="0">
               <a:schemeClr val="accent1"/>
             </a:effectRef>
             <a:fontRef idx="minor">
@@ -4579,15 +4603,16 @@
                 <a:srgbClr val="8FBFBF"/>
               </a:solidFill>
             </a:ln>
-          </p:spPr>
-          <p:style>
-            <a:lnRef idx="2">
-              <a:schemeClr val="accent1"/>
-            </a:lnRef>
-            <a:fillRef idx="0">
-              <a:schemeClr val="accent1"/>
-            </a:fillRef>
-            <a:effectRef idx="1">
+            <a:effectLst/>
+          </p:spPr>
+          <p:style>
+            <a:lnRef idx="2">
+              <a:schemeClr val="accent1"/>
+            </a:lnRef>
+            <a:fillRef idx="0">
+              <a:schemeClr val="accent1"/>
+            </a:fillRef>
+            <a:effectRef idx="0">
               <a:schemeClr val="accent1"/>
             </a:effectRef>
             <a:fontRef idx="minor">
@@ -4614,15 +4639,16 @@
                 <a:srgbClr val="8FBFBF"/>
               </a:solidFill>
             </a:ln>
-          </p:spPr>
-          <p:style>
-            <a:lnRef idx="2">
-              <a:schemeClr val="accent1"/>
-            </a:lnRef>
-            <a:fillRef idx="0">
-              <a:schemeClr val="accent1"/>
-            </a:fillRef>
-            <a:effectRef idx="1">
+            <a:effectLst/>
+          </p:spPr>
+          <p:style>
+            <a:lnRef idx="2">
+              <a:schemeClr val="accent1"/>
+            </a:lnRef>
+            <a:fillRef idx="0">
+              <a:schemeClr val="accent1"/>
+            </a:fillRef>
+            <a:effectRef idx="0">
               <a:schemeClr val="accent1"/>
             </a:effectRef>
             <a:fontRef idx="minor">
@@ -4649,15 +4675,16 @@
                 <a:srgbClr val="8FBFBF"/>
               </a:solidFill>
             </a:ln>
-          </p:spPr>
-          <p:style>
-            <a:lnRef idx="2">
-              <a:schemeClr val="accent1"/>
-            </a:lnRef>
-            <a:fillRef idx="0">
-              <a:schemeClr val="accent1"/>
-            </a:fillRef>
-            <a:effectRef idx="1">
+            <a:effectLst/>
+          </p:spPr>
+          <p:style>
+            <a:lnRef idx="2">
+              <a:schemeClr val="accent1"/>
+            </a:lnRef>
+            <a:fillRef idx="0">
+              <a:schemeClr val="accent1"/>
+            </a:fillRef>
+            <a:effectRef idx="0">
               <a:schemeClr val="accent1"/>
             </a:effectRef>
             <a:fontRef idx="minor">
@@ -4709,7 +4736,7 @@
             <a:fillRef idx="3">
               <a:schemeClr val="accent1"/>
             </a:fillRef>
-            <a:effectRef idx="2">
+            <a:effectRef idx="0">
               <a:schemeClr val="accent1"/>
             </a:effectRef>
             <a:fontRef idx="minor">
@@ -4743,15 +4770,16 @@
                 <a:srgbClr val="8FBFBF"/>
               </a:solidFill>
             </a:ln>
-          </p:spPr>
-          <p:style>
-            <a:lnRef idx="2">
-              <a:schemeClr val="accent1"/>
-            </a:lnRef>
-            <a:fillRef idx="0">
-              <a:schemeClr val="accent1"/>
-            </a:fillRef>
-            <a:effectRef idx="1">
+            <a:effectLst/>
+          </p:spPr>
+          <p:style>
+            <a:lnRef idx="2">
+              <a:schemeClr val="accent1"/>
+            </a:lnRef>
+            <a:fillRef idx="0">
+              <a:schemeClr val="accent1"/>
+            </a:fillRef>
+            <a:effectRef idx="0">
               <a:schemeClr val="accent1"/>
             </a:effectRef>
             <a:fontRef idx="minor">
@@ -4778,15 +4806,16 @@
                 <a:srgbClr val="8FBFBF"/>
               </a:solidFill>
             </a:ln>
-          </p:spPr>
-          <p:style>
-            <a:lnRef idx="2">
-              <a:schemeClr val="accent1"/>
-            </a:lnRef>
-            <a:fillRef idx="0">
-              <a:schemeClr val="accent1"/>
-            </a:fillRef>
-            <a:effectRef idx="1">
+            <a:effectLst/>
+          </p:spPr>
+          <p:style>
+            <a:lnRef idx="2">
+              <a:schemeClr val="accent1"/>
+            </a:lnRef>
+            <a:fillRef idx="0">
+              <a:schemeClr val="accent1"/>
+            </a:fillRef>
+            <a:effectRef idx="0">
               <a:schemeClr val="accent1"/>
             </a:effectRef>
             <a:fontRef idx="minor">
@@ -4813,15 +4842,16 @@
                 <a:srgbClr val="8FBFBF"/>
               </a:solidFill>
             </a:ln>
-          </p:spPr>
-          <p:style>
-            <a:lnRef idx="2">
-              <a:schemeClr val="accent1"/>
-            </a:lnRef>
-            <a:fillRef idx="0">
-              <a:schemeClr val="accent1"/>
-            </a:fillRef>
-            <a:effectRef idx="1">
+            <a:effectLst/>
+          </p:spPr>
+          <p:style>
+            <a:lnRef idx="2">
+              <a:schemeClr val="accent1"/>
+            </a:lnRef>
+            <a:fillRef idx="0">
+              <a:schemeClr val="accent1"/>
+            </a:fillRef>
+            <a:effectRef idx="0">
               <a:schemeClr val="accent1"/>
             </a:effectRef>
             <a:fontRef idx="minor">
@@ -4848,15 +4878,16 @@
                 <a:srgbClr val="8FBFBF"/>
               </a:solidFill>
             </a:ln>
-          </p:spPr>
-          <p:style>
-            <a:lnRef idx="2">
-              <a:schemeClr val="accent1"/>
-            </a:lnRef>
-            <a:fillRef idx="0">
-              <a:schemeClr val="accent1"/>
-            </a:fillRef>
-            <a:effectRef idx="1">
+            <a:effectLst/>
+          </p:spPr>
+          <p:style>
+            <a:lnRef idx="2">
+              <a:schemeClr val="accent1"/>
+            </a:lnRef>
+            <a:fillRef idx="0">
+              <a:schemeClr val="accent1"/>
+            </a:fillRef>
+            <a:effectRef idx="0">
               <a:schemeClr val="accent1"/>
             </a:effectRef>
             <a:fontRef idx="minor">
@@ -4883,15 +4914,16 @@
                 <a:srgbClr val="8FBFBF"/>
               </a:solidFill>
             </a:ln>
-          </p:spPr>
-          <p:style>
-            <a:lnRef idx="2">
-              <a:schemeClr val="accent1"/>
-            </a:lnRef>
-            <a:fillRef idx="0">
-              <a:schemeClr val="accent1"/>
-            </a:fillRef>
-            <a:effectRef idx="1">
+            <a:effectLst/>
+          </p:spPr>
+          <p:style>
+            <a:lnRef idx="2">
+              <a:schemeClr val="accent1"/>
+            </a:lnRef>
+            <a:fillRef idx="0">
+              <a:schemeClr val="accent1"/>
+            </a:fillRef>
+            <a:effectRef idx="0">
               <a:schemeClr val="accent1"/>
             </a:effectRef>
             <a:fontRef idx="minor">
@@ -4918,15 +4950,16 @@
                 <a:srgbClr val="8FBFBF"/>
               </a:solidFill>
             </a:ln>
-          </p:spPr>
-          <p:style>
-            <a:lnRef idx="2">
-              <a:schemeClr val="accent1"/>
-            </a:lnRef>
-            <a:fillRef idx="0">
-              <a:schemeClr val="accent1"/>
-            </a:fillRef>
-            <a:effectRef idx="1">
+            <a:effectLst/>
+          </p:spPr>
+          <p:style>
+            <a:lnRef idx="2">
+              <a:schemeClr val="accent1"/>
+            </a:lnRef>
+            <a:fillRef idx="0">
+              <a:schemeClr val="accent1"/>
+            </a:fillRef>
+            <a:effectRef idx="0">
               <a:schemeClr val="accent1"/>
             </a:effectRef>
             <a:fontRef idx="minor">
@@ -4953,15 +4986,16 @@
                 <a:srgbClr val="8FBFBF"/>
               </a:solidFill>
             </a:ln>
-          </p:spPr>
-          <p:style>
-            <a:lnRef idx="2">
-              <a:schemeClr val="accent1"/>
-            </a:lnRef>
-            <a:fillRef idx="0">
-              <a:schemeClr val="accent1"/>
-            </a:fillRef>
-            <a:effectRef idx="1">
+            <a:effectLst/>
+          </p:spPr>
+          <p:style>
+            <a:lnRef idx="2">
+              <a:schemeClr val="accent1"/>
+            </a:lnRef>
+            <a:fillRef idx="0">
+              <a:schemeClr val="accent1"/>
+            </a:fillRef>
+            <a:effectRef idx="0">
               <a:schemeClr val="accent1"/>
             </a:effectRef>
             <a:fontRef idx="minor">
@@ -4988,15 +5022,16 @@
                 <a:srgbClr val="8FBFBF"/>
               </a:solidFill>
             </a:ln>
-          </p:spPr>
-          <p:style>
-            <a:lnRef idx="2">
-              <a:schemeClr val="accent1"/>
-            </a:lnRef>
-            <a:fillRef idx="0">
-              <a:schemeClr val="accent1"/>
-            </a:fillRef>
-            <a:effectRef idx="1">
+            <a:effectLst/>
+          </p:spPr>
+          <p:style>
+            <a:lnRef idx="2">
+              <a:schemeClr val="accent1"/>
+            </a:lnRef>
+            <a:fillRef idx="0">
+              <a:schemeClr val="accent1"/>
+            </a:fillRef>
+            <a:effectRef idx="0">
               <a:schemeClr val="accent1"/>
             </a:effectRef>
             <a:fontRef idx="minor">
@@ -5023,15 +5058,16 @@
                 <a:srgbClr val="8FBFBF"/>
               </a:solidFill>
             </a:ln>
-          </p:spPr>
-          <p:style>
-            <a:lnRef idx="2">
-              <a:schemeClr val="accent1"/>
-            </a:lnRef>
-            <a:fillRef idx="0">
-              <a:schemeClr val="accent1"/>
-            </a:fillRef>
-            <a:effectRef idx="1">
+            <a:effectLst/>
+          </p:spPr>
+          <p:style>
+            <a:lnRef idx="2">
+              <a:schemeClr val="accent1"/>
+            </a:lnRef>
+            <a:fillRef idx="0">
+              <a:schemeClr val="accent1"/>
+            </a:fillRef>
+            <a:effectRef idx="0">
               <a:schemeClr val="accent1"/>
             </a:effectRef>
             <a:fontRef idx="minor">
@@ -5058,15 +5094,16 @@
                 <a:srgbClr val="8FBFBF"/>
               </a:solidFill>
             </a:ln>
-          </p:spPr>
-          <p:style>
-            <a:lnRef idx="2">
-              <a:schemeClr val="accent1"/>
-            </a:lnRef>
-            <a:fillRef idx="0">
-              <a:schemeClr val="accent1"/>
-            </a:fillRef>
-            <a:effectRef idx="1">
+            <a:effectLst/>
+          </p:spPr>
+          <p:style>
+            <a:lnRef idx="2">
+              <a:schemeClr val="accent1"/>
+            </a:lnRef>
+            <a:fillRef idx="0">
+              <a:schemeClr val="accent1"/>
+            </a:fillRef>
+            <a:effectRef idx="0">
               <a:schemeClr val="accent1"/>
             </a:effectRef>
             <a:fontRef idx="minor">
@@ -5093,15 +5130,16 @@
                 <a:srgbClr val="8FBFBF"/>
               </a:solidFill>
             </a:ln>
-          </p:spPr>
-          <p:style>
-            <a:lnRef idx="2">
-              <a:schemeClr val="accent1"/>
-            </a:lnRef>
-            <a:fillRef idx="0">
-              <a:schemeClr val="accent1"/>
-            </a:fillRef>
-            <a:effectRef idx="1">
+            <a:effectLst/>
+          </p:spPr>
+          <p:style>
+            <a:lnRef idx="2">
+              <a:schemeClr val="accent1"/>
+            </a:lnRef>
+            <a:fillRef idx="0">
+              <a:schemeClr val="accent1"/>
+            </a:fillRef>
+            <a:effectRef idx="0">
               <a:schemeClr val="accent1"/>
             </a:effectRef>
             <a:fontRef idx="minor">
@@ -5128,15 +5166,16 @@
                 <a:srgbClr val="8FBFBF"/>
               </a:solidFill>
             </a:ln>
-          </p:spPr>
-          <p:style>
-            <a:lnRef idx="2">
-              <a:schemeClr val="accent1"/>
-            </a:lnRef>
-            <a:fillRef idx="0">
-              <a:schemeClr val="accent1"/>
-            </a:fillRef>
-            <a:effectRef idx="1">
+            <a:effectLst/>
+          </p:spPr>
+          <p:style>
+            <a:lnRef idx="2">
+              <a:schemeClr val="accent1"/>
+            </a:lnRef>
+            <a:fillRef idx="0">
+              <a:schemeClr val="accent1"/>
+            </a:fillRef>
+            <a:effectRef idx="0">
               <a:schemeClr val="accent1"/>
             </a:effectRef>
             <a:fontRef idx="minor">
@@ -5163,15 +5202,16 @@
                 <a:srgbClr val="8FBFBF"/>
               </a:solidFill>
             </a:ln>
-          </p:spPr>
-          <p:style>
-            <a:lnRef idx="2">
-              <a:schemeClr val="accent1"/>
-            </a:lnRef>
-            <a:fillRef idx="0">
-              <a:schemeClr val="accent1"/>
-            </a:fillRef>
-            <a:effectRef idx="1">
+            <a:effectLst/>
+          </p:spPr>
+          <p:style>
+            <a:lnRef idx="2">
+              <a:schemeClr val="accent1"/>
+            </a:lnRef>
+            <a:fillRef idx="0">
+              <a:schemeClr val="accent1"/>
+            </a:fillRef>
+            <a:effectRef idx="0">
               <a:schemeClr val="accent1"/>
             </a:effectRef>
             <a:fontRef idx="minor">
@@ -5223,7 +5263,7 @@
             <a:fillRef idx="3">
               <a:schemeClr val="accent1"/>
             </a:fillRef>
-            <a:effectRef idx="2">
+            <a:effectRef idx="0">
               <a:schemeClr val="accent1"/>
             </a:effectRef>
             <a:fontRef idx="minor">
@@ -5257,15 +5297,16 @@
                 <a:srgbClr val="8FBFBF"/>
               </a:solidFill>
             </a:ln>
-          </p:spPr>
-          <p:style>
-            <a:lnRef idx="2">
-              <a:schemeClr val="accent1"/>
-            </a:lnRef>
-            <a:fillRef idx="0">
-              <a:schemeClr val="accent1"/>
-            </a:fillRef>
-            <a:effectRef idx="1">
+            <a:effectLst/>
+          </p:spPr>
+          <p:style>
+            <a:lnRef idx="2">
+              <a:schemeClr val="accent1"/>
+            </a:lnRef>
+            <a:fillRef idx="0">
+              <a:schemeClr val="accent1"/>
+            </a:fillRef>
+            <a:effectRef idx="0">
               <a:schemeClr val="accent1"/>
             </a:effectRef>
             <a:fontRef idx="minor">
@@ -5292,15 +5333,16 @@
                 <a:srgbClr val="8FBFBF"/>
               </a:solidFill>
             </a:ln>
-          </p:spPr>
-          <p:style>
-            <a:lnRef idx="2">
-              <a:schemeClr val="accent1"/>
-            </a:lnRef>
-            <a:fillRef idx="0">
-              <a:schemeClr val="accent1"/>
-            </a:fillRef>
-            <a:effectRef idx="1">
+            <a:effectLst/>
+          </p:spPr>
+          <p:style>
+            <a:lnRef idx="2">
+              <a:schemeClr val="accent1"/>
+            </a:lnRef>
+            <a:fillRef idx="0">
+              <a:schemeClr val="accent1"/>
+            </a:fillRef>
+            <a:effectRef idx="0">
               <a:schemeClr val="accent1"/>
             </a:effectRef>
             <a:fontRef idx="minor">
@@ -5327,15 +5369,16 @@
                 <a:srgbClr val="8FBFBF"/>
               </a:solidFill>
             </a:ln>
-          </p:spPr>
-          <p:style>
-            <a:lnRef idx="2">
-              <a:schemeClr val="accent1"/>
-            </a:lnRef>
-            <a:fillRef idx="0">
-              <a:schemeClr val="accent1"/>
-            </a:fillRef>
-            <a:effectRef idx="1">
+            <a:effectLst/>
+          </p:spPr>
+          <p:style>
+            <a:lnRef idx="2">
+              <a:schemeClr val="accent1"/>
+            </a:lnRef>
+            <a:fillRef idx="0">
+              <a:schemeClr val="accent1"/>
+            </a:fillRef>
+            <a:effectRef idx="0">
               <a:schemeClr val="accent1"/>
             </a:effectRef>
             <a:fontRef idx="minor">
@@ -5362,15 +5405,16 @@
                 <a:srgbClr val="8FBFBF"/>
               </a:solidFill>
             </a:ln>
-          </p:spPr>
-          <p:style>
-            <a:lnRef idx="2">
-              <a:schemeClr val="accent1"/>
-            </a:lnRef>
-            <a:fillRef idx="0">
-              <a:schemeClr val="accent1"/>
-            </a:fillRef>
-            <a:effectRef idx="1">
+            <a:effectLst/>
+          </p:spPr>
+          <p:style>
+            <a:lnRef idx="2">
+              <a:schemeClr val="accent1"/>
+            </a:lnRef>
+            <a:fillRef idx="0">
+              <a:schemeClr val="accent1"/>
+            </a:fillRef>
+            <a:effectRef idx="0">
               <a:schemeClr val="accent1"/>
             </a:effectRef>
             <a:fontRef idx="minor">
@@ -5397,15 +5441,16 @@
                 <a:srgbClr val="8FBFBF"/>
               </a:solidFill>
             </a:ln>
-          </p:spPr>
-          <p:style>
-            <a:lnRef idx="2">
-              <a:schemeClr val="accent1"/>
-            </a:lnRef>
-            <a:fillRef idx="0">
-              <a:schemeClr val="accent1"/>
-            </a:fillRef>
-            <a:effectRef idx="1">
+            <a:effectLst/>
+          </p:spPr>
+          <p:style>
+            <a:lnRef idx="2">
+              <a:schemeClr val="accent1"/>
+            </a:lnRef>
+            <a:fillRef idx="0">
+              <a:schemeClr val="accent1"/>
+            </a:fillRef>
+            <a:effectRef idx="0">
               <a:schemeClr val="accent1"/>
             </a:effectRef>
             <a:fontRef idx="minor">
@@ -5432,15 +5477,16 @@
                 <a:srgbClr val="8FBFBF"/>
               </a:solidFill>
             </a:ln>
-          </p:spPr>
-          <p:style>
-            <a:lnRef idx="2">
-              <a:schemeClr val="accent1"/>
-            </a:lnRef>
-            <a:fillRef idx="0">
-              <a:schemeClr val="accent1"/>
-            </a:fillRef>
-            <a:effectRef idx="1">
+            <a:effectLst/>
+          </p:spPr>
+          <p:style>
+            <a:lnRef idx="2">
+              <a:schemeClr val="accent1"/>
+            </a:lnRef>
+            <a:fillRef idx="0">
+              <a:schemeClr val="accent1"/>
+            </a:fillRef>
+            <a:effectRef idx="0">
               <a:schemeClr val="accent1"/>
             </a:effectRef>
             <a:fontRef idx="minor">
@@ -5467,15 +5513,16 @@
                 <a:srgbClr val="8FBFBF"/>
               </a:solidFill>
             </a:ln>
-          </p:spPr>
-          <p:style>
-            <a:lnRef idx="2">
-              <a:schemeClr val="accent1"/>
-            </a:lnRef>
-            <a:fillRef idx="0">
-              <a:schemeClr val="accent1"/>
-            </a:fillRef>
-            <a:effectRef idx="1">
+            <a:effectLst/>
+          </p:spPr>
+          <p:style>
+            <a:lnRef idx="2">
+              <a:schemeClr val="accent1"/>
+            </a:lnRef>
+            <a:fillRef idx="0">
+              <a:schemeClr val="accent1"/>
+            </a:fillRef>
+            <a:effectRef idx="0">
               <a:schemeClr val="accent1"/>
             </a:effectRef>
             <a:fontRef idx="minor">
@@ -5502,15 +5549,16 @@
                 <a:srgbClr val="8FBFBF"/>
               </a:solidFill>
             </a:ln>
-          </p:spPr>
-          <p:style>
-            <a:lnRef idx="2">
-              <a:schemeClr val="accent1"/>
-            </a:lnRef>
-            <a:fillRef idx="0">
-              <a:schemeClr val="accent1"/>
-            </a:fillRef>
-            <a:effectRef idx="1">
+            <a:effectLst/>
+          </p:spPr>
+          <p:style>
+            <a:lnRef idx="2">
+              <a:schemeClr val="accent1"/>
+            </a:lnRef>
+            <a:fillRef idx="0">
+              <a:schemeClr val="accent1"/>
+            </a:fillRef>
+            <a:effectRef idx="0">
               <a:schemeClr val="accent1"/>
             </a:effectRef>
             <a:fontRef idx="minor">
@@ -5537,15 +5585,16 @@
                 <a:srgbClr val="8FBFBF"/>
               </a:solidFill>
             </a:ln>
-          </p:spPr>
-          <p:style>
-            <a:lnRef idx="2">
-              <a:schemeClr val="accent1"/>
-            </a:lnRef>
-            <a:fillRef idx="0">
-              <a:schemeClr val="accent1"/>
-            </a:fillRef>
-            <a:effectRef idx="1">
+            <a:effectLst/>
+          </p:spPr>
+          <p:style>
+            <a:lnRef idx="2">
+              <a:schemeClr val="accent1"/>
+            </a:lnRef>
+            <a:fillRef idx="0">
+              <a:schemeClr val="accent1"/>
+            </a:fillRef>
+            <a:effectRef idx="0">
               <a:schemeClr val="accent1"/>
             </a:effectRef>
             <a:fontRef idx="minor">
@@ -5572,15 +5621,16 @@
                 <a:srgbClr val="8FBFBF"/>
               </a:solidFill>
             </a:ln>
-          </p:spPr>
-          <p:style>
-            <a:lnRef idx="2">
-              <a:schemeClr val="accent1"/>
-            </a:lnRef>
-            <a:fillRef idx="0">
-              <a:schemeClr val="accent1"/>
-            </a:fillRef>
-            <a:effectRef idx="1">
+            <a:effectLst/>
+          </p:spPr>
+          <p:style>
+            <a:lnRef idx="2">
+              <a:schemeClr val="accent1"/>
+            </a:lnRef>
+            <a:fillRef idx="0">
+              <a:schemeClr val="accent1"/>
+            </a:fillRef>
+            <a:effectRef idx="0">
               <a:schemeClr val="accent1"/>
             </a:effectRef>
             <a:fontRef idx="minor">
@@ -5607,15 +5657,16 @@
                 <a:srgbClr val="8FBFBF"/>
               </a:solidFill>
             </a:ln>
-          </p:spPr>
-          <p:style>
-            <a:lnRef idx="2">
-              <a:schemeClr val="accent1"/>
-            </a:lnRef>
-            <a:fillRef idx="0">
-              <a:schemeClr val="accent1"/>
-            </a:fillRef>
-            <a:effectRef idx="1">
+            <a:effectLst/>
+          </p:spPr>
+          <p:style>
+            <a:lnRef idx="2">
+              <a:schemeClr val="accent1"/>
+            </a:lnRef>
+            <a:fillRef idx="0">
+              <a:schemeClr val="accent1"/>
+            </a:fillRef>
+            <a:effectRef idx="0">
               <a:schemeClr val="accent1"/>
             </a:effectRef>
             <a:fontRef idx="minor">
@@ -5642,15 +5693,16 @@
                 <a:srgbClr val="8FBFBF"/>
               </a:solidFill>
             </a:ln>
-          </p:spPr>
-          <p:style>
-            <a:lnRef idx="2">
-              <a:schemeClr val="accent1"/>
-            </a:lnRef>
-            <a:fillRef idx="0">
-              <a:schemeClr val="accent1"/>
-            </a:fillRef>
-            <a:effectRef idx="1">
+            <a:effectLst/>
+          </p:spPr>
+          <p:style>
+            <a:lnRef idx="2">
+              <a:schemeClr val="accent1"/>
+            </a:lnRef>
+            <a:fillRef idx="0">
+              <a:schemeClr val="accent1"/>
+            </a:fillRef>
+            <a:effectRef idx="0">
               <a:schemeClr val="accent1"/>
             </a:effectRef>
             <a:fontRef idx="minor">
@@ -5677,15 +5729,16 @@
                 <a:srgbClr val="8FBFBF"/>
               </a:solidFill>
             </a:ln>
-          </p:spPr>
-          <p:style>
-            <a:lnRef idx="2">
-              <a:schemeClr val="accent1"/>
-            </a:lnRef>
-            <a:fillRef idx="0">
-              <a:schemeClr val="accent1"/>
-            </a:fillRef>
-            <a:effectRef idx="1">
+            <a:effectLst/>
+          </p:spPr>
+          <p:style>
+            <a:lnRef idx="2">
+              <a:schemeClr val="accent1"/>
+            </a:lnRef>
+            <a:fillRef idx="0">
+              <a:schemeClr val="accent1"/>
+            </a:fillRef>
+            <a:effectRef idx="0">
               <a:schemeClr val="accent1"/>
             </a:effectRef>
             <a:fontRef idx="minor">
@@ -5737,7 +5790,7 @@
             <a:fillRef idx="3">
               <a:schemeClr val="accent1"/>
             </a:fillRef>
-            <a:effectRef idx="2">
+            <a:effectRef idx="0">
               <a:schemeClr val="accent1"/>
             </a:effectRef>
             <a:fontRef idx="minor">
@@ -5771,15 +5824,16 @@
                 <a:srgbClr val="8FBFBF"/>
               </a:solidFill>
             </a:ln>
-          </p:spPr>
-          <p:style>
-            <a:lnRef idx="2">
-              <a:schemeClr val="accent1"/>
-            </a:lnRef>
-            <a:fillRef idx="0">
-              <a:schemeClr val="accent1"/>
-            </a:fillRef>
-            <a:effectRef idx="1">
+            <a:effectLst/>
+          </p:spPr>
+          <p:style>
+            <a:lnRef idx="2">
+              <a:schemeClr val="accent1"/>
+            </a:lnRef>
+            <a:fillRef idx="0">
+              <a:schemeClr val="accent1"/>
+            </a:fillRef>
+            <a:effectRef idx="0">
               <a:schemeClr val="accent1"/>
             </a:effectRef>
             <a:fontRef idx="minor">
@@ -5806,15 +5860,16 @@
                 <a:srgbClr val="8FBFBF"/>
               </a:solidFill>
             </a:ln>
-          </p:spPr>
-          <p:style>
-            <a:lnRef idx="2">
-              <a:schemeClr val="accent1"/>
-            </a:lnRef>
-            <a:fillRef idx="0">
-              <a:schemeClr val="accent1"/>
-            </a:fillRef>
-            <a:effectRef idx="1">
+            <a:effectLst/>
+          </p:spPr>
+          <p:style>
+            <a:lnRef idx="2">
+              <a:schemeClr val="accent1"/>
+            </a:lnRef>
+            <a:fillRef idx="0">
+              <a:schemeClr val="accent1"/>
+            </a:fillRef>
+            <a:effectRef idx="0">
               <a:schemeClr val="accent1"/>
             </a:effectRef>
             <a:fontRef idx="minor">
@@ -5841,15 +5896,16 @@
                 <a:srgbClr val="8FBFBF"/>
               </a:solidFill>
             </a:ln>
-          </p:spPr>
-          <p:style>
-            <a:lnRef idx="2">
-              <a:schemeClr val="accent1"/>
-            </a:lnRef>
-            <a:fillRef idx="0">
-              <a:schemeClr val="accent1"/>
-            </a:fillRef>
-            <a:effectRef idx="1">
+            <a:effectLst/>
+          </p:spPr>
+          <p:style>
+            <a:lnRef idx="2">
+              <a:schemeClr val="accent1"/>
+            </a:lnRef>
+            <a:fillRef idx="0">
+              <a:schemeClr val="accent1"/>
+            </a:fillRef>
+            <a:effectRef idx="0">
               <a:schemeClr val="accent1"/>
             </a:effectRef>
             <a:fontRef idx="minor">
@@ -5876,15 +5932,16 @@
                 <a:srgbClr val="8FBFBF"/>
               </a:solidFill>
             </a:ln>
-          </p:spPr>
-          <p:style>
-            <a:lnRef idx="2">
-              <a:schemeClr val="accent1"/>
-            </a:lnRef>
-            <a:fillRef idx="0">
-              <a:schemeClr val="accent1"/>
-            </a:fillRef>
-            <a:effectRef idx="1">
+            <a:effectLst/>
+          </p:spPr>
+          <p:style>
+            <a:lnRef idx="2">
+              <a:schemeClr val="accent1"/>
+            </a:lnRef>
+            <a:fillRef idx="0">
+              <a:schemeClr val="accent1"/>
+            </a:fillRef>
+            <a:effectRef idx="0">
               <a:schemeClr val="accent1"/>
             </a:effectRef>
             <a:fontRef idx="minor">
@@ -5911,15 +5968,16 @@
                 <a:srgbClr val="8FBFBF"/>
               </a:solidFill>
             </a:ln>
-          </p:spPr>
-          <p:style>
-            <a:lnRef idx="2">
-              <a:schemeClr val="accent1"/>
-            </a:lnRef>
-            <a:fillRef idx="0">
-              <a:schemeClr val="accent1"/>
-            </a:fillRef>
-            <a:effectRef idx="1">
+            <a:effectLst/>
+          </p:spPr>
+          <p:style>
+            <a:lnRef idx="2">
+              <a:schemeClr val="accent1"/>
+            </a:lnRef>
+            <a:fillRef idx="0">
+              <a:schemeClr val="accent1"/>
+            </a:fillRef>
+            <a:effectRef idx="0">
               <a:schemeClr val="accent1"/>
             </a:effectRef>
             <a:fontRef idx="minor">
@@ -5946,15 +6004,16 @@
                 <a:srgbClr val="8FBFBF"/>
               </a:solidFill>
             </a:ln>
-          </p:spPr>
-          <p:style>
-            <a:lnRef idx="2">
-              <a:schemeClr val="accent1"/>
-            </a:lnRef>
-            <a:fillRef idx="0">
-              <a:schemeClr val="accent1"/>
-            </a:fillRef>
-            <a:effectRef idx="1">
+            <a:effectLst/>
+          </p:spPr>
+          <p:style>
+            <a:lnRef idx="2">
+              <a:schemeClr val="accent1"/>
+            </a:lnRef>
+            <a:fillRef idx="0">
+              <a:schemeClr val="accent1"/>
+            </a:fillRef>
+            <a:effectRef idx="0">
               <a:schemeClr val="accent1"/>
             </a:effectRef>
             <a:fontRef idx="minor">
@@ -5981,15 +6040,16 @@
                 <a:srgbClr val="8FBFBF"/>
               </a:solidFill>
             </a:ln>
-          </p:spPr>
-          <p:style>
-            <a:lnRef idx="2">
-              <a:schemeClr val="accent1"/>
-            </a:lnRef>
-            <a:fillRef idx="0">
-              <a:schemeClr val="accent1"/>
-            </a:fillRef>
-            <a:effectRef idx="1">
+            <a:effectLst/>
+          </p:spPr>
+          <p:style>
+            <a:lnRef idx="2">
+              <a:schemeClr val="accent1"/>
+            </a:lnRef>
+            <a:fillRef idx="0">
+              <a:schemeClr val="accent1"/>
+            </a:fillRef>
+            <a:effectRef idx="0">
               <a:schemeClr val="accent1"/>
             </a:effectRef>
             <a:fontRef idx="minor">
@@ -6016,15 +6076,16 @@
                 <a:srgbClr val="8FBFBF"/>
               </a:solidFill>
             </a:ln>
-          </p:spPr>
-          <p:style>
-            <a:lnRef idx="2">
-              <a:schemeClr val="accent1"/>
-            </a:lnRef>
-            <a:fillRef idx="0">
-              <a:schemeClr val="accent1"/>
-            </a:fillRef>
-            <a:effectRef idx="1">
+            <a:effectLst/>
+          </p:spPr>
+          <p:style>
+            <a:lnRef idx="2">
+              <a:schemeClr val="accent1"/>
+            </a:lnRef>
+            <a:fillRef idx="0">
+              <a:schemeClr val="accent1"/>
+            </a:fillRef>
+            <a:effectRef idx="0">
               <a:schemeClr val="accent1"/>
             </a:effectRef>
             <a:fontRef idx="minor">
@@ -6051,15 +6112,16 @@
                 <a:srgbClr val="8FBFBF"/>
               </a:solidFill>
             </a:ln>
-          </p:spPr>
-          <p:style>
-            <a:lnRef idx="2">
-              <a:schemeClr val="accent1"/>
-            </a:lnRef>
-            <a:fillRef idx="0">
-              <a:schemeClr val="accent1"/>
-            </a:fillRef>
-            <a:effectRef idx="1">
+            <a:effectLst/>
+          </p:spPr>
+          <p:style>
+            <a:lnRef idx="2">
+              <a:schemeClr val="accent1"/>
+            </a:lnRef>
+            <a:fillRef idx="0">
+              <a:schemeClr val="accent1"/>
+            </a:fillRef>
+            <a:effectRef idx="0">
               <a:schemeClr val="accent1"/>
             </a:effectRef>
             <a:fontRef idx="minor">
@@ -6086,15 +6148,16 @@
                 <a:srgbClr val="8FBFBF"/>
               </a:solidFill>
             </a:ln>
-          </p:spPr>
-          <p:style>
-            <a:lnRef idx="2">
-              <a:schemeClr val="accent1"/>
-            </a:lnRef>
-            <a:fillRef idx="0">
-              <a:schemeClr val="accent1"/>
-            </a:fillRef>
-            <a:effectRef idx="1">
+            <a:effectLst/>
+          </p:spPr>
+          <p:style>
+            <a:lnRef idx="2">
+              <a:schemeClr val="accent1"/>
+            </a:lnRef>
+            <a:fillRef idx="0">
+              <a:schemeClr val="accent1"/>
+            </a:fillRef>
+            <a:effectRef idx="0">
               <a:schemeClr val="accent1"/>
             </a:effectRef>
             <a:fontRef idx="minor">
@@ -6121,15 +6184,16 @@
                 <a:srgbClr val="8FBFBF"/>
               </a:solidFill>
             </a:ln>
-          </p:spPr>
-          <p:style>
-            <a:lnRef idx="2">
-              <a:schemeClr val="accent1"/>
-            </a:lnRef>
-            <a:fillRef idx="0">
-              <a:schemeClr val="accent1"/>
-            </a:fillRef>
-            <a:effectRef idx="1">
+            <a:effectLst/>
+          </p:spPr>
+          <p:style>
+            <a:lnRef idx="2">
+              <a:schemeClr val="accent1"/>
+            </a:lnRef>
+            <a:fillRef idx="0">
+              <a:schemeClr val="accent1"/>
+            </a:fillRef>
+            <a:effectRef idx="0">
               <a:schemeClr val="accent1"/>
             </a:effectRef>
             <a:fontRef idx="minor">
@@ -6156,15 +6220,16 @@
                 <a:srgbClr val="8FBFBF"/>
               </a:solidFill>
             </a:ln>
-          </p:spPr>
-          <p:style>
-            <a:lnRef idx="2">
-              <a:schemeClr val="accent1"/>
-            </a:lnRef>
-            <a:fillRef idx="0">
-              <a:schemeClr val="accent1"/>
-            </a:fillRef>
-            <a:effectRef idx="1">
+            <a:effectLst/>
+          </p:spPr>
+          <p:style>
+            <a:lnRef idx="2">
+              <a:schemeClr val="accent1"/>
+            </a:lnRef>
+            <a:fillRef idx="0">
+              <a:schemeClr val="accent1"/>
+            </a:fillRef>
+            <a:effectRef idx="0">
               <a:schemeClr val="accent1"/>
             </a:effectRef>
             <a:fontRef idx="minor">
@@ -6191,15 +6256,16 @@
                 <a:srgbClr val="8FBFBF"/>
               </a:solidFill>
             </a:ln>
-          </p:spPr>
-          <p:style>
-            <a:lnRef idx="2">
-              <a:schemeClr val="accent1"/>
-            </a:lnRef>
-            <a:fillRef idx="0">
-              <a:schemeClr val="accent1"/>
-            </a:fillRef>
-            <a:effectRef idx="1">
+            <a:effectLst/>
+          </p:spPr>
+          <p:style>
+            <a:lnRef idx="2">
+              <a:schemeClr val="accent1"/>
+            </a:lnRef>
+            <a:fillRef idx="0">
+              <a:schemeClr val="accent1"/>
+            </a:fillRef>
+            <a:effectRef idx="0">
               <a:schemeClr val="accent1"/>
             </a:effectRef>
             <a:fontRef idx="minor">
@@ -6251,7 +6317,7 @@
             <a:fillRef idx="3">
               <a:schemeClr val="accent1"/>
             </a:fillRef>
-            <a:effectRef idx="2">
+            <a:effectRef idx="0">
               <a:schemeClr val="accent1"/>
             </a:effectRef>
             <a:fontRef idx="minor">
@@ -6285,15 +6351,16 @@
                 <a:srgbClr val="8FBFBF"/>
               </a:solidFill>
             </a:ln>
-          </p:spPr>
-          <p:style>
-            <a:lnRef idx="2">
-              <a:schemeClr val="accent1"/>
-            </a:lnRef>
-            <a:fillRef idx="0">
-              <a:schemeClr val="accent1"/>
-            </a:fillRef>
-            <a:effectRef idx="1">
+            <a:effectLst/>
+          </p:spPr>
+          <p:style>
+            <a:lnRef idx="2">
+              <a:schemeClr val="accent1"/>
+            </a:lnRef>
+            <a:fillRef idx="0">
+              <a:schemeClr val="accent1"/>
+            </a:fillRef>
+            <a:effectRef idx="0">
               <a:schemeClr val="accent1"/>
             </a:effectRef>
             <a:fontRef idx="minor">
@@ -6320,15 +6387,16 @@
                 <a:srgbClr val="8FBFBF"/>
               </a:solidFill>
             </a:ln>
-          </p:spPr>
-          <p:style>
-            <a:lnRef idx="2">
-              <a:schemeClr val="accent1"/>
-            </a:lnRef>
-            <a:fillRef idx="0">
-              <a:schemeClr val="accent1"/>
-            </a:fillRef>
-            <a:effectRef idx="1">
+            <a:effectLst/>
+          </p:spPr>
+          <p:style>
+            <a:lnRef idx="2">
+              <a:schemeClr val="accent1"/>
+            </a:lnRef>
+            <a:fillRef idx="0">
+              <a:schemeClr val="accent1"/>
+            </a:fillRef>
+            <a:effectRef idx="0">
               <a:schemeClr val="accent1"/>
             </a:effectRef>
             <a:fontRef idx="minor">
@@ -6355,15 +6423,16 @@
                 <a:srgbClr val="8FBFBF"/>
               </a:solidFill>
             </a:ln>
-          </p:spPr>
-          <p:style>
-            <a:lnRef idx="2">
-              <a:schemeClr val="accent1"/>
-            </a:lnRef>
-            <a:fillRef idx="0">
-              <a:schemeClr val="accent1"/>
-            </a:fillRef>
-            <a:effectRef idx="1">
+            <a:effectLst/>
+          </p:spPr>
+          <p:style>
+            <a:lnRef idx="2">
+              <a:schemeClr val="accent1"/>
+            </a:lnRef>
+            <a:fillRef idx="0">
+              <a:schemeClr val="accent1"/>
+            </a:fillRef>
+            <a:effectRef idx="0">
               <a:schemeClr val="accent1"/>
             </a:effectRef>
             <a:fontRef idx="minor">
@@ -6390,15 +6459,16 @@
                 <a:srgbClr val="8FBFBF"/>
               </a:solidFill>
             </a:ln>
-          </p:spPr>
-          <p:style>
-            <a:lnRef idx="2">
-              <a:schemeClr val="accent1"/>
-            </a:lnRef>
-            <a:fillRef idx="0">
-              <a:schemeClr val="accent1"/>
-            </a:fillRef>
-            <a:effectRef idx="1">
+            <a:effectLst/>
+          </p:spPr>
+          <p:style>
+            <a:lnRef idx="2">
+              <a:schemeClr val="accent1"/>
+            </a:lnRef>
+            <a:fillRef idx="0">
+              <a:schemeClr val="accent1"/>
+            </a:fillRef>
+            <a:effectRef idx="0">
               <a:schemeClr val="accent1"/>
             </a:effectRef>
             <a:fontRef idx="minor">
@@ -6425,15 +6495,16 @@
                 <a:srgbClr val="8FBFBF"/>
               </a:solidFill>
             </a:ln>
-          </p:spPr>
-          <p:style>
-            <a:lnRef idx="2">
-              <a:schemeClr val="accent1"/>
-            </a:lnRef>
-            <a:fillRef idx="0">
-              <a:schemeClr val="accent1"/>
-            </a:fillRef>
-            <a:effectRef idx="1">
+            <a:effectLst/>
+          </p:spPr>
+          <p:style>
+            <a:lnRef idx="2">
+              <a:schemeClr val="accent1"/>
+            </a:lnRef>
+            <a:fillRef idx="0">
+              <a:schemeClr val="accent1"/>
+            </a:fillRef>
+            <a:effectRef idx="0">
               <a:schemeClr val="accent1"/>
             </a:effectRef>
             <a:fontRef idx="minor">
@@ -6460,15 +6531,16 @@
                 <a:srgbClr val="8FBFBF"/>
               </a:solidFill>
             </a:ln>
-          </p:spPr>
-          <p:style>
-            <a:lnRef idx="2">
-              <a:schemeClr val="accent1"/>
-            </a:lnRef>
-            <a:fillRef idx="0">
-              <a:schemeClr val="accent1"/>
-            </a:fillRef>
-            <a:effectRef idx="1">
+            <a:effectLst/>
+          </p:spPr>
+          <p:style>
+            <a:lnRef idx="2">
+              <a:schemeClr val="accent1"/>
+            </a:lnRef>
+            <a:fillRef idx="0">
+              <a:schemeClr val="accent1"/>
+            </a:fillRef>
+            <a:effectRef idx="0">
               <a:schemeClr val="accent1"/>
             </a:effectRef>
             <a:fontRef idx="minor">
@@ -6495,15 +6567,16 @@
                 <a:srgbClr val="8FBFBF"/>
               </a:solidFill>
             </a:ln>
-          </p:spPr>
-          <p:style>
-            <a:lnRef idx="2">
-              <a:schemeClr val="accent1"/>
-            </a:lnRef>
-            <a:fillRef idx="0">
-              <a:schemeClr val="accent1"/>
-            </a:fillRef>
-            <a:effectRef idx="1">
+            <a:effectLst/>
+          </p:spPr>
+          <p:style>
+            <a:lnRef idx="2">
+              <a:schemeClr val="accent1"/>
+            </a:lnRef>
+            <a:fillRef idx="0">
+              <a:schemeClr val="accent1"/>
+            </a:fillRef>
+            <a:effectRef idx="0">
               <a:schemeClr val="accent1"/>
             </a:effectRef>
             <a:fontRef idx="minor">
@@ -6530,15 +6603,16 @@
                 <a:srgbClr val="8FBFBF"/>
               </a:solidFill>
             </a:ln>
-          </p:spPr>
-          <p:style>
-            <a:lnRef idx="2">
-              <a:schemeClr val="accent1"/>
-            </a:lnRef>
-            <a:fillRef idx="0">
-              <a:schemeClr val="accent1"/>
-            </a:fillRef>
-            <a:effectRef idx="1">
+            <a:effectLst/>
+          </p:spPr>
+          <p:style>
+            <a:lnRef idx="2">
+              <a:schemeClr val="accent1"/>
+            </a:lnRef>
+            <a:fillRef idx="0">
+              <a:schemeClr val="accent1"/>
+            </a:fillRef>
+            <a:effectRef idx="0">
               <a:schemeClr val="accent1"/>
             </a:effectRef>
             <a:fontRef idx="minor">
@@ -6565,15 +6639,16 @@
                 <a:srgbClr val="8FBFBF"/>
               </a:solidFill>
             </a:ln>
-          </p:spPr>
-          <p:style>
-            <a:lnRef idx="2">
-              <a:schemeClr val="accent1"/>
-            </a:lnRef>
-            <a:fillRef idx="0">
-              <a:schemeClr val="accent1"/>
-            </a:fillRef>
-            <a:effectRef idx="1">
+            <a:effectLst/>
+          </p:spPr>
+          <p:style>
+            <a:lnRef idx="2">
+              <a:schemeClr val="accent1"/>
+            </a:lnRef>
+            <a:fillRef idx="0">
+              <a:schemeClr val="accent1"/>
+            </a:fillRef>
+            <a:effectRef idx="0">
               <a:schemeClr val="accent1"/>
             </a:effectRef>
             <a:fontRef idx="minor">
@@ -6600,15 +6675,16 @@
                 <a:srgbClr val="8FBFBF"/>
               </a:solidFill>
             </a:ln>
-          </p:spPr>
-          <p:style>
-            <a:lnRef idx="2">
-              <a:schemeClr val="accent1"/>
-            </a:lnRef>
-            <a:fillRef idx="0">
-              <a:schemeClr val="accent1"/>
-            </a:fillRef>
-            <a:effectRef idx="1">
+            <a:effectLst/>
+          </p:spPr>
+          <p:style>
+            <a:lnRef idx="2">
+              <a:schemeClr val="accent1"/>
+            </a:lnRef>
+            <a:fillRef idx="0">
+              <a:schemeClr val="accent1"/>
+            </a:fillRef>
+            <a:effectRef idx="0">
               <a:schemeClr val="accent1"/>
             </a:effectRef>
             <a:fontRef idx="minor">
@@ -6635,15 +6711,16 @@
                 <a:srgbClr val="8FBFBF"/>
               </a:solidFill>
             </a:ln>
-          </p:spPr>
-          <p:style>
-            <a:lnRef idx="2">
-              <a:schemeClr val="accent1"/>
-            </a:lnRef>
-            <a:fillRef idx="0">
-              <a:schemeClr val="accent1"/>
-            </a:fillRef>
-            <a:effectRef idx="1">
+            <a:effectLst/>
+          </p:spPr>
+          <p:style>
+            <a:lnRef idx="2">
+              <a:schemeClr val="accent1"/>
+            </a:lnRef>
+            <a:fillRef idx="0">
+              <a:schemeClr val="accent1"/>
+            </a:fillRef>
+            <a:effectRef idx="0">
               <a:schemeClr val="accent1"/>
             </a:effectRef>
             <a:fontRef idx="minor">
@@ -6670,15 +6747,16 @@
                 <a:srgbClr val="8FBFBF"/>
               </a:solidFill>
             </a:ln>
-          </p:spPr>
-          <p:style>
-            <a:lnRef idx="2">
-              <a:schemeClr val="accent1"/>
-            </a:lnRef>
-            <a:fillRef idx="0">
-              <a:schemeClr val="accent1"/>
-            </a:fillRef>
-            <a:effectRef idx="1">
+            <a:effectLst/>
+          </p:spPr>
+          <p:style>
+            <a:lnRef idx="2">
+              <a:schemeClr val="accent1"/>
+            </a:lnRef>
+            <a:fillRef idx="0">
+              <a:schemeClr val="accent1"/>
+            </a:fillRef>
+            <a:effectRef idx="0">
               <a:schemeClr val="accent1"/>
             </a:effectRef>
             <a:fontRef idx="minor">
@@ -6705,15 +6783,16 @@
                 <a:srgbClr val="8FBFBF"/>
               </a:solidFill>
             </a:ln>
-          </p:spPr>
-          <p:style>
-            <a:lnRef idx="2">
-              <a:schemeClr val="accent1"/>
-            </a:lnRef>
-            <a:fillRef idx="0">
-              <a:schemeClr val="accent1"/>
-            </a:fillRef>
-            <a:effectRef idx="1">
+            <a:effectLst/>
+          </p:spPr>
+          <p:style>
+            <a:lnRef idx="2">
+              <a:schemeClr val="accent1"/>
+            </a:lnRef>
+            <a:fillRef idx="0">
+              <a:schemeClr val="accent1"/>
+            </a:fillRef>
+            <a:effectRef idx="0">
               <a:schemeClr val="accent1"/>
             </a:effectRef>
             <a:fontRef idx="minor">

--- a/gakkyu/tegami/pptx/T5.pptx
+++ b/gakkyu/tegami/pptx/T5.pptx
@@ -3568,44 +3568,9 @@
           </a:p>
         </p:txBody>
       </p:sp>
-      <p:sp>
-        <p:nvSpPr>
-          <p:cNvPr id="3" name="名前欄"/>
-          <p:cNvSpPr txBox="1"/>
-          <p:nvPr/>
-        </p:nvSpPr>
-        <p:spPr>
-          <a:xfrm>
-            <a:off x="3600000" y="475200"/>
-            <a:ext cx="3420000" cy="252000"/>
-          </a:xfrm>
-          <a:prstGeom prst="rect">
-            <a:avLst/>
-          </a:prstGeom>
-          <a:noFill/>
-        </p:spPr>
-        <p:txBody>
-          <a:bodyPr wrap="square" lIns="0" rIns="0" tIns="0" bIns="0" anchor="t">
-            <a:spAutoFit/>
-          </a:bodyPr>
-          <a:lstStyle/>
-          <a:p>
-            <a:pPr algn="r"/>
-            <a:r>
-              <a:rPr sz="1000" b="0">
-                <a:solidFill>
-                  <a:srgbClr val="38424B"/>
-                </a:solidFill>
-                <a:latin typeface="UD デジタル 教科書体 N-R"/>
-              </a:rPr>
-              <a:t>（　　年　　組　　名前　　　　　　　　）</a:t>
-            </a:r>
-          </a:p>
-        </p:txBody>
-      </p:sp>
       <p:cxnSp>
         <p:nvCxnSpPr>
-          <p:cNvPr id="4" name="見出しの線"/>
+          <p:cNvPr id="3" name="見出しの線"/>
           <p:cNvCxnSpPr/>
           <p:nvPr/>
         </p:nvCxnSpPr>
@@ -3641,7 +3606,7 @@
       </p:cxnSp>
       <p:grpSp>
         <p:nvGrpSpPr>
-          <p:cNvPr id="5" name="1行目（右から）"/>
+          <p:cNvPr id="4" name="1行目（右から）"/>
           <p:cNvGrpSpPr/>
           <p:nvPr/>
         </p:nvGrpSpPr>
@@ -3655,7 +3620,7 @@
         </p:grpSpPr>
         <p:sp>
           <p:nvSpPr>
-            <p:cNvPr id="6" name="外わく"/>
+            <p:cNvPr id="5" name="外わく"/>
             <p:cNvSpPr/>
             <p:nvPr/>
           </p:nvSpPr>
@@ -3699,7 +3664,7 @@
         </p:sp>
         <p:cxnSp>
           <p:nvCxnSpPr>
-            <p:cNvPr id="7" name="マスの線 1"/>
+            <p:cNvPr id="6" name="マスの線 1"/>
             <p:cNvCxnSpPr/>
             <p:nvPr/>
           </p:nvCxnSpPr>
@@ -3735,7 +3700,7 @@
         </p:cxnSp>
         <p:cxnSp>
           <p:nvCxnSpPr>
-            <p:cNvPr id="8" name="マスの線 2"/>
+            <p:cNvPr id="7" name="マスの線 2"/>
             <p:cNvCxnSpPr/>
             <p:nvPr/>
           </p:nvCxnSpPr>
@@ -3771,7 +3736,7 @@
         </p:cxnSp>
         <p:cxnSp>
           <p:nvCxnSpPr>
-            <p:cNvPr id="9" name="マスの線 3"/>
+            <p:cNvPr id="8" name="マスの線 3"/>
             <p:cNvCxnSpPr/>
             <p:nvPr/>
           </p:nvCxnSpPr>
@@ -3807,7 +3772,7 @@
         </p:cxnSp>
         <p:cxnSp>
           <p:nvCxnSpPr>
-            <p:cNvPr id="10" name="マスの線 4"/>
+            <p:cNvPr id="9" name="マスの線 4"/>
             <p:cNvCxnSpPr/>
             <p:nvPr/>
           </p:nvCxnSpPr>
@@ -3843,7 +3808,7 @@
         </p:cxnSp>
         <p:cxnSp>
           <p:nvCxnSpPr>
-            <p:cNvPr id="11" name="マスの線 5"/>
+            <p:cNvPr id="10" name="マスの線 5"/>
             <p:cNvCxnSpPr/>
             <p:nvPr/>
           </p:nvCxnSpPr>
@@ -3879,7 +3844,7 @@
         </p:cxnSp>
         <p:cxnSp>
           <p:nvCxnSpPr>
-            <p:cNvPr id="12" name="マスの線 6"/>
+            <p:cNvPr id="11" name="マスの線 6"/>
             <p:cNvCxnSpPr/>
             <p:nvPr/>
           </p:nvCxnSpPr>
@@ -3915,7 +3880,7 @@
         </p:cxnSp>
         <p:cxnSp>
           <p:nvCxnSpPr>
-            <p:cNvPr id="13" name="マスの線 7"/>
+            <p:cNvPr id="12" name="マスの線 7"/>
             <p:cNvCxnSpPr/>
             <p:nvPr/>
           </p:nvCxnSpPr>
@@ -3951,7 +3916,7 @@
         </p:cxnSp>
         <p:cxnSp>
           <p:nvCxnSpPr>
-            <p:cNvPr id="14" name="マスの線 8"/>
+            <p:cNvPr id="13" name="マスの線 8"/>
             <p:cNvCxnSpPr/>
             <p:nvPr/>
           </p:nvCxnSpPr>
@@ -3987,7 +3952,7 @@
         </p:cxnSp>
         <p:cxnSp>
           <p:nvCxnSpPr>
-            <p:cNvPr id="15" name="マスの線 9"/>
+            <p:cNvPr id="14" name="マスの線 9"/>
             <p:cNvCxnSpPr/>
             <p:nvPr/>
           </p:nvCxnSpPr>
@@ -4023,7 +3988,7 @@
         </p:cxnSp>
         <p:cxnSp>
           <p:nvCxnSpPr>
-            <p:cNvPr id="16" name="マスの線 10"/>
+            <p:cNvPr id="15" name="マスの線 10"/>
             <p:cNvCxnSpPr/>
             <p:nvPr/>
           </p:nvCxnSpPr>
@@ -4059,7 +4024,7 @@
         </p:cxnSp>
         <p:cxnSp>
           <p:nvCxnSpPr>
-            <p:cNvPr id="17" name="マスの線 11"/>
+            <p:cNvPr id="16" name="マスの線 11"/>
             <p:cNvCxnSpPr/>
             <p:nvPr/>
           </p:nvCxnSpPr>
@@ -4095,7 +4060,7 @@
         </p:cxnSp>
         <p:cxnSp>
           <p:nvCxnSpPr>
-            <p:cNvPr id="18" name="マスの線 12"/>
+            <p:cNvPr id="17" name="マスの線 12"/>
             <p:cNvCxnSpPr/>
             <p:nvPr/>
           </p:nvCxnSpPr>
@@ -4131,7 +4096,7 @@
         </p:cxnSp>
         <p:cxnSp>
           <p:nvCxnSpPr>
-            <p:cNvPr id="19" name="マスの線 13"/>
+            <p:cNvPr id="18" name="マスの線 13"/>
             <p:cNvCxnSpPr/>
             <p:nvPr/>
           </p:nvCxnSpPr>
@@ -4168,7 +4133,7 @@
       </p:grpSp>
       <p:grpSp>
         <p:nvGrpSpPr>
-          <p:cNvPr id="20" name="2行目（右から）"/>
+          <p:cNvPr id="19" name="2行目（右から）"/>
           <p:cNvGrpSpPr/>
           <p:nvPr/>
         </p:nvGrpSpPr>
@@ -4182,7 +4147,7 @@
         </p:grpSpPr>
         <p:sp>
           <p:nvSpPr>
-            <p:cNvPr id="21" name="外わく"/>
+            <p:cNvPr id="20" name="外わく"/>
             <p:cNvSpPr/>
             <p:nvPr/>
           </p:nvSpPr>
@@ -4226,7 +4191,7 @@
         </p:sp>
         <p:cxnSp>
           <p:nvCxnSpPr>
-            <p:cNvPr id="22" name="マスの線 1"/>
+            <p:cNvPr id="21" name="マスの線 1"/>
             <p:cNvCxnSpPr/>
             <p:nvPr/>
           </p:nvCxnSpPr>
@@ -4262,7 +4227,7 @@
         </p:cxnSp>
         <p:cxnSp>
           <p:nvCxnSpPr>
-            <p:cNvPr id="23" name="マスの線 2"/>
+            <p:cNvPr id="22" name="マスの線 2"/>
             <p:cNvCxnSpPr/>
             <p:nvPr/>
           </p:nvCxnSpPr>
@@ -4298,7 +4263,7 @@
         </p:cxnSp>
         <p:cxnSp>
           <p:nvCxnSpPr>
-            <p:cNvPr id="24" name="マスの線 3"/>
+            <p:cNvPr id="23" name="マスの線 3"/>
             <p:cNvCxnSpPr/>
             <p:nvPr/>
           </p:nvCxnSpPr>
@@ -4334,7 +4299,7 @@
         </p:cxnSp>
         <p:cxnSp>
           <p:nvCxnSpPr>
-            <p:cNvPr id="25" name="マスの線 4"/>
+            <p:cNvPr id="24" name="マスの線 4"/>
             <p:cNvCxnSpPr/>
             <p:nvPr/>
           </p:nvCxnSpPr>
@@ -4370,7 +4335,7 @@
         </p:cxnSp>
         <p:cxnSp>
           <p:nvCxnSpPr>
-            <p:cNvPr id="26" name="マスの線 5"/>
+            <p:cNvPr id="25" name="マスの線 5"/>
             <p:cNvCxnSpPr/>
             <p:nvPr/>
           </p:nvCxnSpPr>
@@ -4406,7 +4371,7 @@
         </p:cxnSp>
         <p:cxnSp>
           <p:nvCxnSpPr>
-            <p:cNvPr id="27" name="マスの線 6"/>
+            <p:cNvPr id="26" name="マスの線 6"/>
             <p:cNvCxnSpPr/>
             <p:nvPr/>
           </p:nvCxnSpPr>
@@ -4442,7 +4407,7 @@
         </p:cxnSp>
         <p:cxnSp>
           <p:nvCxnSpPr>
-            <p:cNvPr id="28" name="マスの線 7"/>
+            <p:cNvPr id="27" name="マスの線 7"/>
             <p:cNvCxnSpPr/>
             <p:nvPr/>
           </p:nvCxnSpPr>
@@ -4478,7 +4443,7 @@
         </p:cxnSp>
         <p:cxnSp>
           <p:nvCxnSpPr>
-            <p:cNvPr id="29" name="マスの線 8"/>
+            <p:cNvPr id="28" name="マスの線 8"/>
             <p:cNvCxnSpPr/>
             <p:nvPr/>
           </p:nvCxnSpPr>
@@ -4514,7 +4479,7 @@
         </p:cxnSp>
         <p:cxnSp>
           <p:nvCxnSpPr>
-            <p:cNvPr id="30" name="マスの線 9"/>
+            <p:cNvPr id="29" name="マスの線 9"/>
             <p:cNvCxnSpPr/>
             <p:nvPr/>
           </p:nvCxnSpPr>
@@ -4550,7 +4515,7 @@
         </p:cxnSp>
         <p:cxnSp>
           <p:nvCxnSpPr>
-            <p:cNvPr id="31" name="マスの線 10"/>
+            <p:cNvPr id="30" name="マスの線 10"/>
             <p:cNvCxnSpPr/>
             <p:nvPr/>
           </p:nvCxnSpPr>
@@ -4586,7 +4551,7 @@
         </p:cxnSp>
         <p:cxnSp>
           <p:nvCxnSpPr>
-            <p:cNvPr id="32" name="マスの線 11"/>
+            <p:cNvPr id="31" name="マスの線 11"/>
             <p:cNvCxnSpPr/>
             <p:nvPr/>
           </p:nvCxnSpPr>
@@ -4622,7 +4587,7 @@
         </p:cxnSp>
         <p:cxnSp>
           <p:nvCxnSpPr>
-            <p:cNvPr id="33" name="マスの線 12"/>
+            <p:cNvPr id="32" name="マスの線 12"/>
             <p:cNvCxnSpPr/>
             <p:nvPr/>
           </p:nvCxnSpPr>
@@ -4658,7 +4623,7 @@
         </p:cxnSp>
         <p:cxnSp>
           <p:nvCxnSpPr>
-            <p:cNvPr id="34" name="マスの線 13"/>
+            <p:cNvPr id="33" name="マスの線 13"/>
             <p:cNvCxnSpPr/>
             <p:nvPr/>
           </p:nvCxnSpPr>
@@ -4695,7 +4660,7 @@
       </p:grpSp>
       <p:grpSp>
         <p:nvGrpSpPr>
-          <p:cNvPr id="35" name="3行目（右から）"/>
+          <p:cNvPr id="34" name="3行目（右から）"/>
           <p:cNvGrpSpPr/>
           <p:nvPr/>
         </p:nvGrpSpPr>
@@ -4709,7 +4674,7 @@
         </p:grpSpPr>
         <p:sp>
           <p:nvSpPr>
-            <p:cNvPr id="36" name="外わく"/>
+            <p:cNvPr id="35" name="外わく"/>
             <p:cNvSpPr/>
             <p:nvPr/>
           </p:nvSpPr>
@@ -4753,7 +4718,7 @@
         </p:sp>
         <p:cxnSp>
           <p:nvCxnSpPr>
-            <p:cNvPr id="37" name="マスの線 1"/>
+            <p:cNvPr id="36" name="マスの線 1"/>
             <p:cNvCxnSpPr/>
             <p:nvPr/>
           </p:nvCxnSpPr>
@@ -4789,7 +4754,7 @@
         </p:cxnSp>
         <p:cxnSp>
           <p:nvCxnSpPr>
-            <p:cNvPr id="38" name="マスの線 2"/>
+            <p:cNvPr id="37" name="マスの線 2"/>
             <p:cNvCxnSpPr/>
             <p:nvPr/>
           </p:nvCxnSpPr>
@@ -4825,7 +4790,7 @@
         </p:cxnSp>
         <p:cxnSp>
           <p:nvCxnSpPr>
-            <p:cNvPr id="39" name="マスの線 3"/>
+            <p:cNvPr id="38" name="マスの線 3"/>
             <p:cNvCxnSpPr/>
             <p:nvPr/>
           </p:nvCxnSpPr>
@@ -4861,7 +4826,7 @@
         </p:cxnSp>
         <p:cxnSp>
           <p:nvCxnSpPr>
-            <p:cNvPr id="40" name="マスの線 4"/>
+            <p:cNvPr id="39" name="マスの線 4"/>
             <p:cNvCxnSpPr/>
             <p:nvPr/>
           </p:nvCxnSpPr>
@@ -4897,7 +4862,7 @@
         </p:cxnSp>
         <p:cxnSp>
           <p:nvCxnSpPr>
-            <p:cNvPr id="41" name="マスの線 5"/>
+            <p:cNvPr id="40" name="マスの線 5"/>
             <p:cNvCxnSpPr/>
             <p:nvPr/>
           </p:nvCxnSpPr>
@@ -4933,7 +4898,7 @@
         </p:cxnSp>
         <p:cxnSp>
           <p:nvCxnSpPr>
-            <p:cNvPr id="42" name="マスの線 6"/>
+            <p:cNvPr id="41" name="マスの線 6"/>
             <p:cNvCxnSpPr/>
             <p:nvPr/>
           </p:nvCxnSpPr>
@@ -4969,7 +4934,7 @@
         </p:cxnSp>
         <p:cxnSp>
           <p:nvCxnSpPr>
-            <p:cNvPr id="43" name="マスの線 7"/>
+            <p:cNvPr id="42" name="マスの線 7"/>
             <p:cNvCxnSpPr/>
             <p:nvPr/>
           </p:nvCxnSpPr>
@@ -5005,7 +4970,7 @@
         </p:cxnSp>
         <p:cxnSp>
           <p:nvCxnSpPr>
-            <p:cNvPr id="44" name="マスの線 8"/>
+            <p:cNvPr id="43" name="マスの線 8"/>
             <p:cNvCxnSpPr/>
             <p:nvPr/>
           </p:nvCxnSpPr>
@@ -5041,7 +5006,7 @@
         </p:cxnSp>
         <p:cxnSp>
           <p:nvCxnSpPr>
-            <p:cNvPr id="45" name="マスの線 9"/>
+            <p:cNvPr id="44" name="マスの線 9"/>
             <p:cNvCxnSpPr/>
             <p:nvPr/>
           </p:nvCxnSpPr>
@@ -5077,7 +5042,7 @@
         </p:cxnSp>
         <p:cxnSp>
           <p:nvCxnSpPr>
-            <p:cNvPr id="46" name="マスの線 10"/>
+            <p:cNvPr id="45" name="マスの線 10"/>
             <p:cNvCxnSpPr/>
             <p:nvPr/>
           </p:nvCxnSpPr>
@@ -5113,7 +5078,7 @@
         </p:cxnSp>
         <p:cxnSp>
           <p:nvCxnSpPr>
-            <p:cNvPr id="47" name="マスの線 11"/>
+            <p:cNvPr id="46" name="マスの線 11"/>
             <p:cNvCxnSpPr/>
             <p:nvPr/>
           </p:nvCxnSpPr>
@@ -5149,7 +5114,7 @@
         </p:cxnSp>
         <p:cxnSp>
           <p:nvCxnSpPr>
-            <p:cNvPr id="48" name="マスの線 12"/>
+            <p:cNvPr id="47" name="マスの線 12"/>
             <p:cNvCxnSpPr/>
             <p:nvPr/>
           </p:nvCxnSpPr>
@@ -5185,7 +5150,7 @@
         </p:cxnSp>
         <p:cxnSp>
           <p:nvCxnSpPr>
-            <p:cNvPr id="49" name="マスの線 13"/>
+            <p:cNvPr id="48" name="マスの線 13"/>
             <p:cNvCxnSpPr/>
             <p:nvPr/>
           </p:nvCxnSpPr>
@@ -5222,7 +5187,7 @@
       </p:grpSp>
       <p:grpSp>
         <p:nvGrpSpPr>
-          <p:cNvPr id="50" name="4行目（右から）"/>
+          <p:cNvPr id="49" name="4行目（右から）"/>
           <p:cNvGrpSpPr/>
           <p:nvPr/>
         </p:nvGrpSpPr>
@@ -5236,7 +5201,7 @@
         </p:grpSpPr>
         <p:sp>
           <p:nvSpPr>
-            <p:cNvPr id="51" name="外わく"/>
+            <p:cNvPr id="50" name="外わく"/>
             <p:cNvSpPr/>
             <p:nvPr/>
           </p:nvSpPr>
@@ -5280,7 +5245,7 @@
         </p:sp>
         <p:cxnSp>
           <p:nvCxnSpPr>
-            <p:cNvPr id="52" name="マスの線 1"/>
+            <p:cNvPr id="51" name="マスの線 1"/>
             <p:cNvCxnSpPr/>
             <p:nvPr/>
           </p:nvCxnSpPr>
@@ -5316,7 +5281,7 @@
         </p:cxnSp>
         <p:cxnSp>
           <p:nvCxnSpPr>
-            <p:cNvPr id="53" name="マスの線 2"/>
+            <p:cNvPr id="52" name="マスの線 2"/>
             <p:cNvCxnSpPr/>
             <p:nvPr/>
           </p:nvCxnSpPr>
@@ -5352,7 +5317,7 @@
         </p:cxnSp>
         <p:cxnSp>
           <p:nvCxnSpPr>
-            <p:cNvPr id="54" name="マスの線 3"/>
+            <p:cNvPr id="53" name="マスの線 3"/>
             <p:cNvCxnSpPr/>
             <p:nvPr/>
           </p:nvCxnSpPr>
@@ -5388,7 +5353,7 @@
         </p:cxnSp>
         <p:cxnSp>
           <p:nvCxnSpPr>
-            <p:cNvPr id="55" name="マスの線 4"/>
+            <p:cNvPr id="54" name="マスの線 4"/>
             <p:cNvCxnSpPr/>
             <p:nvPr/>
           </p:nvCxnSpPr>
@@ -5424,7 +5389,7 @@
         </p:cxnSp>
         <p:cxnSp>
           <p:nvCxnSpPr>
-            <p:cNvPr id="56" name="マスの線 5"/>
+            <p:cNvPr id="55" name="マスの線 5"/>
             <p:cNvCxnSpPr/>
             <p:nvPr/>
           </p:nvCxnSpPr>
@@ -5460,7 +5425,7 @@
         </p:cxnSp>
         <p:cxnSp>
           <p:nvCxnSpPr>
-            <p:cNvPr id="57" name="マスの線 6"/>
+            <p:cNvPr id="56" name="マスの線 6"/>
             <p:cNvCxnSpPr/>
             <p:nvPr/>
           </p:nvCxnSpPr>
@@ -5496,7 +5461,7 @@
         </p:cxnSp>
         <p:cxnSp>
           <p:nvCxnSpPr>
-            <p:cNvPr id="58" name="マスの線 7"/>
+            <p:cNvPr id="57" name="マスの線 7"/>
             <p:cNvCxnSpPr/>
             <p:nvPr/>
           </p:nvCxnSpPr>
@@ -5532,7 +5497,7 @@
         </p:cxnSp>
         <p:cxnSp>
           <p:nvCxnSpPr>
-            <p:cNvPr id="59" name="マスの線 8"/>
+            <p:cNvPr id="58" name="マスの線 8"/>
             <p:cNvCxnSpPr/>
             <p:nvPr/>
           </p:nvCxnSpPr>
@@ -5568,7 +5533,7 @@
         </p:cxnSp>
         <p:cxnSp>
           <p:nvCxnSpPr>
-            <p:cNvPr id="60" name="マスの線 9"/>
+            <p:cNvPr id="59" name="マスの線 9"/>
             <p:cNvCxnSpPr/>
             <p:nvPr/>
           </p:nvCxnSpPr>
@@ -5604,7 +5569,7 @@
         </p:cxnSp>
         <p:cxnSp>
           <p:nvCxnSpPr>
-            <p:cNvPr id="61" name="マスの線 10"/>
+            <p:cNvPr id="60" name="マスの線 10"/>
             <p:cNvCxnSpPr/>
             <p:nvPr/>
           </p:nvCxnSpPr>
@@ -5640,7 +5605,7 @@
         </p:cxnSp>
         <p:cxnSp>
           <p:nvCxnSpPr>
-            <p:cNvPr id="62" name="マスの線 11"/>
+            <p:cNvPr id="61" name="マスの線 11"/>
             <p:cNvCxnSpPr/>
             <p:nvPr/>
           </p:nvCxnSpPr>
@@ -5676,7 +5641,7 @@
         </p:cxnSp>
         <p:cxnSp>
           <p:nvCxnSpPr>
-            <p:cNvPr id="63" name="マスの線 12"/>
+            <p:cNvPr id="62" name="マスの線 12"/>
             <p:cNvCxnSpPr/>
             <p:nvPr/>
           </p:nvCxnSpPr>
@@ -5712,7 +5677,7 @@
         </p:cxnSp>
         <p:cxnSp>
           <p:nvCxnSpPr>
-            <p:cNvPr id="64" name="マスの線 13"/>
+            <p:cNvPr id="63" name="マスの線 13"/>
             <p:cNvCxnSpPr/>
             <p:nvPr/>
           </p:nvCxnSpPr>
@@ -5749,7 +5714,7 @@
       </p:grpSp>
       <p:grpSp>
         <p:nvGrpSpPr>
-          <p:cNvPr id="65" name="5行目（右から）"/>
+          <p:cNvPr id="64" name="5行目（右から）"/>
           <p:cNvGrpSpPr/>
           <p:nvPr/>
         </p:nvGrpSpPr>
@@ -5763,7 +5728,7 @@
         </p:grpSpPr>
         <p:sp>
           <p:nvSpPr>
-            <p:cNvPr id="66" name="外わく"/>
+            <p:cNvPr id="65" name="外わく"/>
             <p:cNvSpPr/>
             <p:nvPr/>
           </p:nvSpPr>
@@ -5807,7 +5772,7 @@
         </p:sp>
         <p:cxnSp>
           <p:nvCxnSpPr>
-            <p:cNvPr id="67" name="マスの線 1"/>
+            <p:cNvPr id="66" name="マスの線 1"/>
             <p:cNvCxnSpPr/>
             <p:nvPr/>
           </p:nvCxnSpPr>
@@ -5843,7 +5808,7 @@
         </p:cxnSp>
         <p:cxnSp>
           <p:nvCxnSpPr>
-            <p:cNvPr id="68" name="マスの線 2"/>
+            <p:cNvPr id="67" name="マスの線 2"/>
             <p:cNvCxnSpPr/>
             <p:nvPr/>
           </p:nvCxnSpPr>
@@ -5879,7 +5844,7 @@
         </p:cxnSp>
         <p:cxnSp>
           <p:nvCxnSpPr>
-            <p:cNvPr id="69" name="マスの線 3"/>
+            <p:cNvPr id="68" name="マスの線 3"/>
             <p:cNvCxnSpPr/>
             <p:nvPr/>
           </p:nvCxnSpPr>
@@ -5915,7 +5880,7 @@
         </p:cxnSp>
         <p:cxnSp>
           <p:nvCxnSpPr>
-            <p:cNvPr id="70" name="マスの線 4"/>
+            <p:cNvPr id="69" name="マスの線 4"/>
             <p:cNvCxnSpPr/>
             <p:nvPr/>
           </p:nvCxnSpPr>
@@ -5951,7 +5916,7 @@
         </p:cxnSp>
         <p:cxnSp>
           <p:nvCxnSpPr>
-            <p:cNvPr id="71" name="マスの線 5"/>
+            <p:cNvPr id="70" name="マスの線 5"/>
             <p:cNvCxnSpPr/>
             <p:nvPr/>
           </p:nvCxnSpPr>
@@ -5987,7 +5952,7 @@
         </p:cxnSp>
         <p:cxnSp>
           <p:nvCxnSpPr>
-            <p:cNvPr id="72" name="マスの線 6"/>
+            <p:cNvPr id="71" name="マスの線 6"/>
             <p:cNvCxnSpPr/>
             <p:nvPr/>
           </p:nvCxnSpPr>
@@ -6023,7 +5988,7 @@
         </p:cxnSp>
         <p:cxnSp>
           <p:nvCxnSpPr>
-            <p:cNvPr id="73" name="マスの線 7"/>
+            <p:cNvPr id="72" name="マスの線 7"/>
             <p:cNvCxnSpPr/>
             <p:nvPr/>
           </p:nvCxnSpPr>
@@ -6059,7 +6024,7 @@
         </p:cxnSp>
         <p:cxnSp>
           <p:nvCxnSpPr>
-            <p:cNvPr id="74" name="マスの線 8"/>
+            <p:cNvPr id="73" name="マスの線 8"/>
             <p:cNvCxnSpPr/>
             <p:nvPr/>
           </p:nvCxnSpPr>
@@ -6095,7 +6060,7 @@
         </p:cxnSp>
         <p:cxnSp>
           <p:nvCxnSpPr>
-            <p:cNvPr id="75" name="マスの線 9"/>
+            <p:cNvPr id="74" name="マスの線 9"/>
             <p:cNvCxnSpPr/>
             <p:nvPr/>
           </p:nvCxnSpPr>
@@ -6131,7 +6096,7 @@
         </p:cxnSp>
         <p:cxnSp>
           <p:nvCxnSpPr>
-            <p:cNvPr id="76" name="マスの線 10"/>
+            <p:cNvPr id="75" name="マスの線 10"/>
             <p:cNvCxnSpPr/>
             <p:nvPr/>
           </p:nvCxnSpPr>
@@ -6167,7 +6132,7 @@
         </p:cxnSp>
         <p:cxnSp>
           <p:nvCxnSpPr>
-            <p:cNvPr id="77" name="マスの線 11"/>
+            <p:cNvPr id="76" name="マスの線 11"/>
             <p:cNvCxnSpPr/>
             <p:nvPr/>
           </p:nvCxnSpPr>
@@ -6203,7 +6168,7 @@
         </p:cxnSp>
         <p:cxnSp>
           <p:nvCxnSpPr>
-            <p:cNvPr id="78" name="マスの線 12"/>
+            <p:cNvPr id="77" name="マスの線 12"/>
             <p:cNvCxnSpPr/>
             <p:nvPr/>
           </p:nvCxnSpPr>
@@ -6239,7 +6204,7 @@
         </p:cxnSp>
         <p:cxnSp>
           <p:nvCxnSpPr>
-            <p:cNvPr id="79" name="マスの線 13"/>
+            <p:cNvPr id="78" name="マスの線 13"/>
             <p:cNvCxnSpPr/>
             <p:nvPr/>
           </p:nvCxnSpPr>
@@ -6276,7 +6241,7 @@
       </p:grpSp>
       <p:grpSp>
         <p:nvGrpSpPr>
-          <p:cNvPr id="80" name="6行目（右から）"/>
+          <p:cNvPr id="79" name="6行目（右から）"/>
           <p:cNvGrpSpPr/>
           <p:nvPr/>
         </p:nvGrpSpPr>
@@ -6290,7 +6255,7 @@
         </p:grpSpPr>
         <p:sp>
           <p:nvSpPr>
-            <p:cNvPr id="81" name="外わく"/>
+            <p:cNvPr id="80" name="外わく"/>
             <p:cNvSpPr/>
             <p:nvPr/>
           </p:nvSpPr>
@@ -6334,7 +6299,7 @@
         </p:sp>
         <p:cxnSp>
           <p:nvCxnSpPr>
-            <p:cNvPr id="82" name="マスの線 1"/>
+            <p:cNvPr id="81" name="マスの線 1"/>
             <p:cNvCxnSpPr/>
             <p:nvPr/>
           </p:nvCxnSpPr>
@@ -6370,7 +6335,7 @@
         </p:cxnSp>
         <p:cxnSp>
           <p:nvCxnSpPr>
-            <p:cNvPr id="83" name="マスの線 2"/>
+            <p:cNvPr id="82" name="マスの線 2"/>
             <p:cNvCxnSpPr/>
             <p:nvPr/>
           </p:nvCxnSpPr>
@@ -6406,7 +6371,7 @@
         </p:cxnSp>
         <p:cxnSp>
           <p:nvCxnSpPr>
-            <p:cNvPr id="84" name="マスの線 3"/>
+            <p:cNvPr id="83" name="マスの線 3"/>
             <p:cNvCxnSpPr/>
             <p:nvPr/>
           </p:nvCxnSpPr>
@@ -6442,7 +6407,7 @@
         </p:cxnSp>
         <p:cxnSp>
           <p:nvCxnSpPr>
-            <p:cNvPr id="85" name="マスの線 4"/>
+            <p:cNvPr id="84" name="マスの線 4"/>
             <p:cNvCxnSpPr/>
             <p:nvPr/>
           </p:nvCxnSpPr>
@@ -6478,7 +6443,7 @@
         </p:cxnSp>
         <p:cxnSp>
           <p:nvCxnSpPr>
-            <p:cNvPr id="86" name="マスの線 5"/>
+            <p:cNvPr id="85" name="マスの線 5"/>
             <p:cNvCxnSpPr/>
             <p:nvPr/>
           </p:nvCxnSpPr>
@@ -6514,7 +6479,7 @@
         </p:cxnSp>
         <p:cxnSp>
           <p:nvCxnSpPr>
-            <p:cNvPr id="87" name="マスの線 6"/>
+            <p:cNvPr id="86" name="マスの線 6"/>
             <p:cNvCxnSpPr/>
             <p:nvPr/>
           </p:nvCxnSpPr>
@@ -6550,7 +6515,7 @@
         </p:cxnSp>
         <p:cxnSp>
           <p:nvCxnSpPr>
-            <p:cNvPr id="88" name="マスの線 7"/>
+            <p:cNvPr id="87" name="マスの線 7"/>
             <p:cNvCxnSpPr/>
             <p:nvPr/>
           </p:nvCxnSpPr>
@@ -6586,7 +6551,7 @@
         </p:cxnSp>
         <p:cxnSp>
           <p:nvCxnSpPr>
-            <p:cNvPr id="89" name="マスの線 8"/>
+            <p:cNvPr id="88" name="マスの線 8"/>
             <p:cNvCxnSpPr/>
             <p:nvPr/>
           </p:nvCxnSpPr>
@@ -6622,7 +6587,7 @@
         </p:cxnSp>
         <p:cxnSp>
           <p:nvCxnSpPr>
-            <p:cNvPr id="90" name="マスの線 9"/>
+            <p:cNvPr id="89" name="マスの線 9"/>
             <p:cNvCxnSpPr/>
             <p:nvPr/>
           </p:nvCxnSpPr>
@@ -6658,7 +6623,7 @@
         </p:cxnSp>
         <p:cxnSp>
           <p:nvCxnSpPr>
-            <p:cNvPr id="91" name="マスの線 10"/>
+            <p:cNvPr id="90" name="マスの線 10"/>
             <p:cNvCxnSpPr/>
             <p:nvPr/>
           </p:nvCxnSpPr>
@@ -6694,7 +6659,7 @@
         </p:cxnSp>
         <p:cxnSp>
           <p:nvCxnSpPr>
-            <p:cNvPr id="92" name="マスの線 11"/>
+            <p:cNvPr id="91" name="マスの線 11"/>
             <p:cNvCxnSpPr/>
             <p:nvPr/>
           </p:nvCxnSpPr>
@@ -6730,7 +6695,7 @@
         </p:cxnSp>
         <p:cxnSp>
           <p:nvCxnSpPr>
-            <p:cNvPr id="93" name="マスの線 12"/>
+            <p:cNvPr id="92" name="マスの線 12"/>
             <p:cNvCxnSpPr/>
             <p:nvPr/>
           </p:nvCxnSpPr>
@@ -6766,7 +6731,7 @@
         </p:cxnSp>
         <p:cxnSp>
           <p:nvCxnSpPr>
-            <p:cNvPr id="94" name="マスの線 13"/>
+            <p:cNvPr id="93" name="マスの線 13"/>
             <p:cNvCxnSpPr/>
             <p:nvPr/>
           </p:nvCxnSpPr>
@@ -6803,7 +6768,7 @@
       </p:grpSp>
       <p:pic>
         <p:nvPicPr>
-          <p:cNvPr id="95" name="さし絵（消してもかまいません）" descr="_tmp_ill.png"/>
+          <p:cNvPr id="94" name="さし絵（消してもかまいません）" descr="_tmp_ill.png"/>
           <p:cNvPicPr>
             <a:picLocks noChangeAspect="1"/>
           </p:cNvPicPr>
@@ -6827,7 +6792,7 @@
       </p:pic>
       <p:sp>
         <p:nvSpPr>
-          <p:cNvPr id="96" name="紙の説明（消してもかまいません）"/>
+          <p:cNvPr id="95" name="紙の説明（消してもかまいません）"/>
           <p:cNvSpPr txBox="1"/>
           <p:nvPr/>
         </p:nvSpPr>
@@ -6862,7 +6827,7 @@
       </p:sp>
       <p:sp>
         <p:nvSpPr>
-          <p:cNvPr id="97" name="クレジット"/>
+          <p:cNvPr id="96" name="クレジット"/>
           <p:cNvSpPr txBox="1"/>
           <p:nvPr/>
         </p:nvSpPr>
